--- a/Sample code/Figure 7. N_limit dependence on parameters/Figure 7 - Nsteps.pptx
+++ b/Sample code/Figure 7. N_limit dependence on parameters/Figure 7 - Nsteps.pptx
@@ -2,18 +2,18 @@
 <file path=ppt/presentation.xml><?xml version="1.0" encoding="utf-8"?>
 <p:presentation xmlns:a="http://schemas.openxmlformats.org/drawingml/2006/main" xmlns:r="http://schemas.openxmlformats.org/officeDocument/2006/relationships" xmlns:p="http://schemas.openxmlformats.org/presentationml/2006/main" saveSubsetFonts="1" autoCompressPictures="0">
   <p:sldMasterIdLst>
-    <p:sldMasterId id="2147483648" r:id="rId1"/>
+    <p:sldMasterId id="2147483660" r:id="rId1"/>
   </p:sldMasterIdLst>
   <p:sldIdLst>
     <p:sldId id="256" r:id="rId2"/>
   </p:sldIdLst>
-  <p:sldSz cx="12192000" cy="6858000"/>
+  <p:sldSz cx="10972800" cy="3657600"/>
   <p:notesSz cx="6858000" cy="9144000"/>
   <p:defaultTextStyle>
     <a:defPPr>
       <a:defRPr lang="en-US"/>
     </a:defPPr>
-    <a:lvl1pPr marL="0" algn="l" defTabSz="914400" rtl="0" eaLnBrk="1" latinLnBrk="0" hangingPunct="1">
+    <a:lvl1pPr marL="0" algn="l" defTabSz="457200" rtl="0" eaLnBrk="1" latinLnBrk="0" hangingPunct="1">
       <a:defRPr sz="1800" kern="1200">
         <a:solidFill>
           <a:schemeClr val="tx1"/>
@@ -23,7 +23,7 @@
         <a:cs typeface="+mn-cs"/>
       </a:defRPr>
     </a:lvl1pPr>
-    <a:lvl2pPr marL="457200" algn="l" defTabSz="914400" rtl="0" eaLnBrk="1" latinLnBrk="0" hangingPunct="1">
+    <a:lvl2pPr marL="457200" algn="l" defTabSz="457200" rtl="0" eaLnBrk="1" latinLnBrk="0" hangingPunct="1">
       <a:defRPr sz="1800" kern="1200">
         <a:solidFill>
           <a:schemeClr val="tx1"/>
@@ -33,7 +33,7 @@
         <a:cs typeface="+mn-cs"/>
       </a:defRPr>
     </a:lvl2pPr>
-    <a:lvl3pPr marL="914400" algn="l" defTabSz="914400" rtl="0" eaLnBrk="1" latinLnBrk="0" hangingPunct="1">
+    <a:lvl3pPr marL="914400" algn="l" defTabSz="457200" rtl="0" eaLnBrk="1" latinLnBrk="0" hangingPunct="1">
       <a:defRPr sz="1800" kern="1200">
         <a:solidFill>
           <a:schemeClr val="tx1"/>
@@ -43,7 +43,7 @@
         <a:cs typeface="+mn-cs"/>
       </a:defRPr>
     </a:lvl3pPr>
-    <a:lvl4pPr marL="1371600" algn="l" defTabSz="914400" rtl="0" eaLnBrk="1" latinLnBrk="0" hangingPunct="1">
+    <a:lvl4pPr marL="1371600" algn="l" defTabSz="457200" rtl="0" eaLnBrk="1" latinLnBrk="0" hangingPunct="1">
       <a:defRPr sz="1800" kern="1200">
         <a:solidFill>
           <a:schemeClr val="tx1"/>
@@ -53,7 +53,7 @@
         <a:cs typeface="+mn-cs"/>
       </a:defRPr>
     </a:lvl4pPr>
-    <a:lvl5pPr marL="1828800" algn="l" defTabSz="914400" rtl="0" eaLnBrk="1" latinLnBrk="0" hangingPunct="1">
+    <a:lvl5pPr marL="1828800" algn="l" defTabSz="457200" rtl="0" eaLnBrk="1" latinLnBrk="0" hangingPunct="1">
       <a:defRPr sz="1800" kern="1200">
         <a:solidFill>
           <a:schemeClr val="tx1"/>
@@ -63,7 +63,7 @@
         <a:cs typeface="+mn-cs"/>
       </a:defRPr>
     </a:lvl5pPr>
-    <a:lvl6pPr marL="2286000" algn="l" defTabSz="914400" rtl="0" eaLnBrk="1" latinLnBrk="0" hangingPunct="1">
+    <a:lvl6pPr marL="2286000" algn="l" defTabSz="457200" rtl="0" eaLnBrk="1" latinLnBrk="0" hangingPunct="1">
       <a:defRPr sz="1800" kern="1200">
         <a:solidFill>
           <a:schemeClr val="tx1"/>
@@ -73,7 +73,7 @@
         <a:cs typeface="+mn-cs"/>
       </a:defRPr>
     </a:lvl6pPr>
-    <a:lvl7pPr marL="2743200" algn="l" defTabSz="914400" rtl="0" eaLnBrk="1" latinLnBrk="0" hangingPunct="1">
+    <a:lvl7pPr marL="2743200" algn="l" defTabSz="457200" rtl="0" eaLnBrk="1" latinLnBrk="0" hangingPunct="1">
       <a:defRPr sz="1800" kern="1200">
         <a:solidFill>
           <a:schemeClr val="tx1"/>
@@ -83,7 +83,7 @@
         <a:cs typeface="+mn-cs"/>
       </a:defRPr>
     </a:lvl7pPr>
-    <a:lvl8pPr marL="3200400" algn="l" defTabSz="914400" rtl="0" eaLnBrk="1" latinLnBrk="0" hangingPunct="1">
+    <a:lvl8pPr marL="3200400" algn="l" defTabSz="457200" rtl="0" eaLnBrk="1" latinLnBrk="0" hangingPunct="1">
       <a:defRPr sz="1800" kern="1200">
         <a:solidFill>
           <a:schemeClr val="tx1"/>
@@ -93,7 +93,7 @@
         <a:cs typeface="+mn-cs"/>
       </a:defRPr>
     </a:lvl8pPr>
-    <a:lvl9pPr marL="3657600" algn="l" defTabSz="914400" rtl="0" eaLnBrk="1" latinLnBrk="0" hangingPunct="1">
+    <a:lvl9pPr marL="3657600" algn="l" defTabSz="457200" rtl="0" eaLnBrk="1" latinLnBrk="0" hangingPunct="1">
       <a:defRPr sz="1800" kern="1200">
         <a:solidFill>
           <a:schemeClr val="tx1"/>
@@ -131,13 +131,7 @@
       </p:grpSpPr>
       <p:sp>
         <p:nvSpPr>
-          <p:cNvPr id="2" name="Title 1">
-            <a:extLst>
-              <a:ext uri="{FF2B5EF4-FFF2-40B4-BE49-F238E27FC236}">
-                <a16:creationId xmlns:a16="http://schemas.microsoft.com/office/drawing/2014/main" id="{D86531F6-40A2-1220-7C63-09D30F82BA0E}"/>
-              </a:ext>
-            </a:extLst>
-          </p:cNvPr>
+          <p:cNvPr id="2" name="Title 1"/>
           <p:cNvSpPr>
             <a:spLocks noGrp="1"/>
           </p:cNvSpPr>
@@ -147,15 +141,15 @@
         </p:nvSpPr>
         <p:spPr>
           <a:xfrm>
-            <a:off x="1524000" y="1122363"/>
-            <a:ext cx="9144000" cy="2387600"/>
+            <a:off x="1371600" y="598593"/>
+            <a:ext cx="8229600" cy="1273387"/>
           </a:xfrm>
         </p:spPr>
         <p:txBody>
           <a:bodyPr anchor="b"/>
           <a:lstStyle>
             <a:lvl1pPr algn="ctr">
-              <a:defRPr sz="6000"/>
+              <a:defRPr sz="3200"/>
             </a:lvl1pPr>
           </a:lstStyle>
           <a:p>
@@ -163,18 +157,13 @@
               <a:rPr lang="en-US"/>
               <a:t>Click to edit Master title style</a:t>
             </a:r>
-          </a:p>
-        </p:txBody>
-      </p:sp>
-      <p:sp>
-        <p:nvSpPr>
-          <p:cNvPr id="3" name="Subtitle 2">
-            <a:extLst>
-              <a:ext uri="{FF2B5EF4-FFF2-40B4-BE49-F238E27FC236}">
-                <a16:creationId xmlns:a16="http://schemas.microsoft.com/office/drawing/2014/main" id="{E2813EFF-5A8C-0EC6-6315-D974C17D7172}"/>
-              </a:ext>
-            </a:extLst>
-          </p:cNvPr>
+            <a:endParaRPr lang="en-US" dirty="0"/>
+          </a:p>
+        </p:txBody>
+      </p:sp>
+      <p:sp>
+        <p:nvSpPr>
+          <p:cNvPr id="3" name="Subtitle 2"/>
           <p:cNvSpPr>
             <a:spLocks noGrp="1"/>
           </p:cNvSpPr>
@@ -184,8 +173,8 @@
         </p:nvSpPr>
         <p:spPr>
           <a:xfrm>
-            <a:off x="1524000" y="3602038"/>
-            <a:ext cx="9144000" cy="1655762"/>
+            <a:off x="1371600" y="1921087"/>
+            <a:ext cx="8229600" cy="883073"/>
           </a:xfrm>
         </p:spPr>
         <p:txBody>
@@ -193,39 +182,39 @@
           <a:lstStyle>
             <a:lvl1pPr marL="0" indent="0" algn="ctr">
               <a:buNone/>
-              <a:defRPr sz="2400"/>
+              <a:defRPr sz="1280"/>
             </a:lvl1pPr>
-            <a:lvl2pPr marL="457200" indent="0" algn="ctr">
-              <a:buNone/>
-              <a:defRPr sz="2000"/>
+            <a:lvl2pPr marL="243825" indent="0" algn="ctr">
+              <a:buNone/>
+              <a:defRPr sz="1067"/>
             </a:lvl2pPr>
-            <a:lvl3pPr marL="914400" indent="0" algn="ctr">
-              <a:buNone/>
-              <a:defRPr sz="1800"/>
+            <a:lvl3pPr marL="487650" indent="0" algn="ctr">
+              <a:buNone/>
+              <a:defRPr sz="960"/>
             </a:lvl3pPr>
-            <a:lvl4pPr marL="1371600" indent="0" algn="ctr">
-              <a:buNone/>
-              <a:defRPr sz="1600"/>
+            <a:lvl4pPr marL="731474" indent="0" algn="ctr">
+              <a:buNone/>
+              <a:defRPr sz="853"/>
             </a:lvl4pPr>
-            <a:lvl5pPr marL="1828800" indent="0" algn="ctr">
-              <a:buNone/>
-              <a:defRPr sz="1600"/>
+            <a:lvl5pPr marL="975299" indent="0" algn="ctr">
+              <a:buNone/>
+              <a:defRPr sz="853"/>
             </a:lvl5pPr>
-            <a:lvl6pPr marL="2286000" indent="0" algn="ctr">
-              <a:buNone/>
-              <a:defRPr sz="1600"/>
+            <a:lvl6pPr marL="1219124" indent="0" algn="ctr">
+              <a:buNone/>
+              <a:defRPr sz="853"/>
             </a:lvl6pPr>
-            <a:lvl7pPr marL="2743200" indent="0" algn="ctr">
-              <a:buNone/>
-              <a:defRPr sz="1600"/>
+            <a:lvl7pPr marL="1462949" indent="0" algn="ctr">
+              <a:buNone/>
+              <a:defRPr sz="853"/>
             </a:lvl7pPr>
-            <a:lvl8pPr marL="3200400" indent="0" algn="ctr">
-              <a:buNone/>
-              <a:defRPr sz="1600"/>
+            <a:lvl8pPr marL="1706773" indent="0" algn="ctr">
+              <a:buNone/>
+              <a:defRPr sz="853"/>
             </a:lvl8pPr>
-            <a:lvl9pPr marL="3657600" indent="0" algn="ctr">
-              <a:buNone/>
-              <a:defRPr sz="1600"/>
+            <a:lvl9pPr marL="1950598" indent="0" algn="ctr">
+              <a:buNone/>
+              <a:defRPr sz="853"/>
             </a:lvl9pPr>
           </a:lstStyle>
           <a:p>
@@ -233,18 +222,13 @@
               <a:rPr lang="en-US"/>
               <a:t>Click to edit Master subtitle style</a:t>
             </a:r>
-          </a:p>
-        </p:txBody>
-      </p:sp>
-      <p:sp>
-        <p:nvSpPr>
-          <p:cNvPr id="4" name="Date Placeholder 3">
-            <a:extLst>
-              <a:ext uri="{FF2B5EF4-FFF2-40B4-BE49-F238E27FC236}">
-                <a16:creationId xmlns:a16="http://schemas.microsoft.com/office/drawing/2014/main" id="{24A0E922-E073-C888-C7A4-E2A9FD799552}"/>
-              </a:ext>
-            </a:extLst>
-          </p:cNvPr>
+            <a:endParaRPr lang="en-US" dirty="0"/>
+          </a:p>
+        </p:txBody>
+      </p:sp>
+      <p:sp>
+        <p:nvSpPr>
+          <p:cNvPr id="4" name="Date Placeholder 3"/>
           <p:cNvSpPr>
             <a:spLocks noGrp="1"/>
           </p:cNvSpPr>
@@ -259,7 +243,7 @@
           <a:p>
             <a:fld id="{BE7A8A13-8D72-A04A-B2C1-C42F42AA96D9}" type="datetimeFigureOut">
               <a:rPr lang="en-US" smtClean="0"/>
-              <a:t>9/7/26</a:t>
+              <a:t>9/17/26</a:t>
             </a:fld>
             <a:endParaRPr lang="en-US"/>
           </a:p>
@@ -267,13 +251,7 @@
       </p:sp>
       <p:sp>
         <p:nvSpPr>
-          <p:cNvPr id="5" name="Footer Placeholder 4">
-            <a:extLst>
-              <a:ext uri="{FF2B5EF4-FFF2-40B4-BE49-F238E27FC236}">
-                <a16:creationId xmlns:a16="http://schemas.microsoft.com/office/drawing/2014/main" id="{B9D2A072-F1A3-3553-35E3-2A9D3F96E891}"/>
-              </a:ext>
-            </a:extLst>
-          </p:cNvPr>
+          <p:cNvPr id="5" name="Footer Placeholder 4"/>
           <p:cNvSpPr>
             <a:spLocks noGrp="1"/>
           </p:cNvSpPr>
@@ -292,13 +270,7 @@
       </p:sp>
       <p:sp>
         <p:nvSpPr>
-          <p:cNvPr id="6" name="Slide Number Placeholder 5">
-            <a:extLst>
-              <a:ext uri="{FF2B5EF4-FFF2-40B4-BE49-F238E27FC236}">
-                <a16:creationId xmlns:a16="http://schemas.microsoft.com/office/drawing/2014/main" id="{16A91960-A8DC-97CB-8075-F7A6F0B264C0}"/>
-              </a:ext>
-            </a:extLst>
-          </p:cNvPr>
+          <p:cNvPr id="6" name="Slide Number Placeholder 5"/>
           <p:cNvSpPr>
             <a:spLocks noGrp="1"/>
           </p:cNvSpPr>
@@ -322,7 +294,7 @@
     </p:spTree>
     <p:extLst>
       <p:ext uri="{BB962C8B-B14F-4D97-AF65-F5344CB8AC3E}">
-        <p14:creationId xmlns:p14="http://schemas.microsoft.com/office/powerpoint/2010/main" val="239699884"/>
+        <p14:creationId xmlns:p14="http://schemas.microsoft.com/office/powerpoint/2010/main" val="1226904290"/>
       </p:ext>
     </p:extLst>
   </p:cSld>
@@ -351,13 +323,7 @@
       </p:grpSpPr>
       <p:sp>
         <p:nvSpPr>
-          <p:cNvPr id="2" name="Title 1">
-            <a:extLst>
-              <a:ext uri="{FF2B5EF4-FFF2-40B4-BE49-F238E27FC236}">
-                <a16:creationId xmlns:a16="http://schemas.microsoft.com/office/drawing/2014/main" id="{F38F5495-E8CD-227D-6D80-972951E20EA9}"/>
-              </a:ext>
-            </a:extLst>
-          </p:cNvPr>
+          <p:cNvPr id="2" name="Title 1"/>
           <p:cNvSpPr>
             <a:spLocks noGrp="1"/>
           </p:cNvSpPr>
@@ -374,18 +340,13 @@
               <a:rPr lang="en-US"/>
               <a:t>Click to edit Master title style</a:t>
             </a:r>
-          </a:p>
-        </p:txBody>
-      </p:sp>
-      <p:sp>
-        <p:nvSpPr>
-          <p:cNvPr id="3" name="Vertical Text Placeholder 2">
-            <a:extLst>
-              <a:ext uri="{FF2B5EF4-FFF2-40B4-BE49-F238E27FC236}">
-                <a16:creationId xmlns:a16="http://schemas.microsoft.com/office/drawing/2014/main" id="{7C9611C5-C329-53F5-2B29-3266C776A5B4}"/>
-              </a:ext>
-            </a:extLst>
-          </p:cNvPr>
+            <a:endParaRPr lang="en-US" dirty="0"/>
+          </a:p>
+        </p:txBody>
+      </p:sp>
+      <p:sp>
+        <p:nvSpPr>
+          <p:cNvPr id="3" name="Vertical Text Placeholder 2"/>
           <p:cNvSpPr>
             <a:spLocks noGrp="1"/>
           </p:cNvSpPr>
@@ -431,18 +392,13 @@
               <a:rPr lang="en-US"/>
               <a:t>Fifth level</a:t>
             </a:r>
-          </a:p>
-        </p:txBody>
-      </p:sp>
-      <p:sp>
-        <p:nvSpPr>
-          <p:cNvPr id="4" name="Date Placeholder 3">
-            <a:extLst>
-              <a:ext uri="{FF2B5EF4-FFF2-40B4-BE49-F238E27FC236}">
-                <a16:creationId xmlns:a16="http://schemas.microsoft.com/office/drawing/2014/main" id="{C6E27B97-4C24-E049-5D26-9290F4844AE4}"/>
-              </a:ext>
-            </a:extLst>
-          </p:cNvPr>
+            <a:endParaRPr lang="en-US" dirty="0"/>
+          </a:p>
+        </p:txBody>
+      </p:sp>
+      <p:sp>
+        <p:nvSpPr>
+          <p:cNvPr id="4" name="Date Placeholder 3"/>
           <p:cNvSpPr>
             <a:spLocks noGrp="1"/>
           </p:cNvSpPr>
@@ -457,7 +413,7 @@
           <a:p>
             <a:fld id="{BE7A8A13-8D72-A04A-B2C1-C42F42AA96D9}" type="datetimeFigureOut">
               <a:rPr lang="en-US" smtClean="0"/>
-              <a:t>9/7/26</a:t>
+              <a:t>9/17/26</a:t>
             </a:fld>
             <a:endParaRPr lang="en-US"/>
           </a:p>
@@ -465,13 +421,7 @@
       </p:sp>
       <p:sp>
         <p:nvSpPr>
-          <p:cNvPr id="5" name="Footer Placeholder 4">
-            <a:extLst>
-              <a:ext uri="{FF2B5EF4-FFF2-40B4-BE49-F238E27FC236}">
-                <a16:creationId xmlns:a16="http://schemas.microsoft.com/office/drawing/2014/main" id="{3C234169-3CFB-F393-E1E0-72538A82817E}"/>
-              </a:ext>
-            </a:extLst>
-          </p:cNvPr>
+          <p:cNvPr id="5" name="Footer Placeholder 4"/>
           <p:cNvSpPr>
             <a:spLocks noGrp="1"/>
           </p:cNvSpPr>
@@ -490,13 +440,7 @@
       </p:sp>
       <p:sp>
         <p:nvSpPr>
-          <p:cNvPr id="6" name="Slide Number Placeholder 5">
-            <a:extLst>
-              <a:ext uri="{FF2B5EF4-FFF2-40B4-BE49-F238E27FC236}">
-                <a16:creationId xmlns:a16="http://schemas.microsoft.com/office/drawing/2014/main" id="{A57C69BB-F5D1-FA3F-0AE0-30E85E4DC910}"/>
-              </a:ext>
-            </a:extLst>
-          </p:cNvPr>
+          <p:cNvPr id="6" name="Slide Number Placeholder 5"/>
           <p:cNvSpPr>
             <a:spLocks noGrp="1"/>
           </p:cNvSpPr>
@@ -520,7 +464,7 @@
     </p:spTree>
     <p:extLst>
       <p:ext uri="{BB962C8B-B14F-4D97-AF65-F5344CB8AC3E}">
-        <p14:creationId xmlns:p14="http://schemas.microsoft.com/office/powerpoint/2010/main" val="3501745691"/>
+        <p14:creationId xmlns:p14="http://schemas.microsoft.com/office/powerpoint/2010/main" val="4098245170"/>
       </p:ext>
     </p:extLst>
   </p:cSld>
@@ -549,13 +493,7 @@
       </p:grpSpPr>
       <p:sp>
         <p:nvSpPr>
-          <p:cNvPr id="2" name="Vertical Title 1">
-            <a:extLst>
-              <a:ext uri="{FF2B5EF4-FFF2-40B4-BE49-F238E27FC236}">
-                <a16:creationId xmlns:a16="http://schemas.microsoft.com/office/drawing/2014/main" id="{986128A7-E068-E85B-AAFB-86289A0123EF}"/>
-              </a:ext>
-            </a:extLst>
-          </p:cNvPr>
+          <p:cNvPr id="2" name="Vertical Title 1"/>
           <p:cNvSpPr>
             <a:spLocks noGrp="1"/>
           </p:cNvSpPr>
@@ -565,8 +503,8 @@
         </p:nvSpPr>
         <p:spPr>
           <a:xfrm>
-            <a:off x="8724900" y="365125"/>
-            <a:ext cx="2628900" cy="5811838"/>
+            <a:off x="7852410" y="194733"/>
+            <a:ext cx="2366010" cy="3099647"/>
           </a:xfrm>
         </p:spPr>
         <p:txBody>
@@ -577,18 +515,13 @@
               <a:rPr lang="en-US"/>
               <a:t>Click to edit Master title style</a:t>
             </a:r>
-          </a:p>
-        </p:txBody>
-      </p:sp>
-      <p:sp>
-        <p:nvSpPr>
-          <p:cNvPr id="3" name="Vertical Text Placeholder 2">
-            <a:extLst>
-              <a:ext uri="{FF2B5EF4-FFF2-40B4-BE49-F238E27FC236}">
-                <a16:creationId xmlns:a16="http://schemas.microsoft.com/office/drawing/2014/main" id="{6DF52689-AD56-D28C-5085-0738B5042D3D}"/>
-              </a:ext>
-            </a:extLst>
-          </p:cNvPr>
+            <a:endParaRPr lang="en-US" dirty="0"/>
+          </a:p>
+        </p:txBody>
+      </p:sp>
+      <p:sp>
+        <p:nvSpPr>
+          <p:cNvPr id="3" name="Vertical Text Placeholder 2"/>
           <p:cNvSpPr>
             <a:spLocks noGrp="1"/>
           </p:cNvSpPr>
@@ -598,8 +531,8 @@
         </p:nvSpPr>
         <p:spPr>
           <a:xfrm>
-            <a:off x="838200" y="365125"/>
-            <a:ext cx="7734300" cy="5811838"/>
+            <a:off x="754380" y="194733"/>
+            <a:ext cx="6960870" cy="3099647"/>
           </a:xfrm>
         </p:spPr>
         <p:txBody>
@@ -639,18 +572,13 @@
               <a:rPr lang="en-US"/>
               <a:t>Fifth level</a:t>
             </a:r>
-          </a:p>
-        </p:txBody>
-      </p:sp>
-      <p:sp>
-        <p:nvSpPr>
-          <p:cNvPr id="4" name="Date Placeholder 3">
-            <a:extLst>
-              <a:ext uri="{FF2B5EF4-FFF2-40B4-BE49-F238E27FC236}">
-                <a16:creationId xmlns:a16="http://schemas.microsoft.com/office/drawing/2014/main" id="{530F4057-16BA-5789-47D0-304AA481696A}"/>
-              </a:ext>
-            </a:extLst>
-          </p:cNvPr>
+            <a:endParaRPr lang="en-US" dirty="0"/>
+          </a:p>
+        </p:txBody>
+      </p:sp>
+      <p:sp>
+        <p:nvSpPr>
+          <p:cNvPr id="4" name="Date Placeholder 3"/>
           <p:cNvSpPr>
             <a:spLocks noGrp="1"/>
           </p:cNvSpPr>
@@ -665,7 +593,7 @@
           <a:p>
             <a:fld id="{BE7A8A13-8D72-A04A-B2C1-C42F42AA96D9}" type="datetimeFigureOut">
               <a:rPr lang="en-US" smtClean="0"/>
-              <a:t>9/7/26</a:t>
+              <a:t>9/17/26</a:t>
             </a:fld>
             <a:endParaRPr lang="en-US"/>
           </a:p>
@@ -673,13 +601,7 @@
       </p:sp>
       <p:sp>
         <p:nvSpPr>
-          <p:cNvPr id="5" name="Footer Placeholder 4">
-            <a:extLst>
-              <a:ext uri="{FF2B5EF4-FFF2-40B4-BE49-F238E27FC236}">
-                <a16:creationId xmlns:a16="http://schemas.microsoft.com/office/drawing/2014/main" id="{E81DF701-2BF5-1164-974F-F778A0E6ED66}"/>
-              </a:ext>
-            </a:extLst>
-          </p:cNvPr>
+          <p:cNvPr id="5" name="Footer Placeholder 4"/>
           <p:cNvSpPr>
             <a:spLocks noGrp="1"/>
           </p:cNvSpPr>
@@ -698,13 +620,7 @@
       </p:sp>
       <p:sp>
         <p:nvSpPr>
-          <p:cNvPr id="6" name="Slide Number Placeholder 5">
-            <a:extLst>
-              <a:ext uri="{FF2B5EF4-FFF2-40B4-BE49-F238E27FC236}">
-                <a16:creationId xmlns:a16="http://schemas.microsoft.com/office/drawing/2014/main" id="{92C75EDB-06CA-C954-94E8-DAA4AC7C25C2}"/>
-              </a:ext>
-            </a:extLst>
-          </p:cNvPr>
+          <p:cNvPr id="6" name="Slide Number Placeholder 5"/>
           <p:cNvSpPr>
             <a:spLocks noGrp="1"/>
           </p:cNvSpPr>
@@ -728,7 +644,7 @@
     </p:spTree>
     <p:extLst>
       <p:ext uri="{BB962C8B-B14F-4D97-AF65-F5344CB8AC3E}">
-        <p14:creationId xmlns:p14="http://schemas.microsoft.com/office/powerpoint/2010/main" val="168845010"/>
+        <p14:creationId xmlns:p14="http://schemas.microsoft.com/office/powerpoint/2010/main" val="171655947"/>
       </p:ext>
     </p:extLst>
   </p:cSld>
@@ -757,13 +673,7 @@
       </p:grpSpPr>
       <p:sp>
         <p:nvSpPr>
-          <p:cNvPr id="2" name="Title 1">
-            <a:extLst>
-              <a:ext uri="{FF2B5EF4-FFF2-40B4-BE49-F238E27FC236}">
-                <a16:creationId xmlns:a16="http://schemas.microsoft.com/office/drawing/2014/main" id="{8D48ECCE-3D20-BF8A-A1AE-76D94EC7A5A3}"/>
-              </a:ext>
-            </a:extLst>
-          </p:cNvPr>
+          <p:cNvPr id="2" name="Title 1"/>
           <p:cNvSpPr>
             <a:spLocks noGrp="1"/>
           </p:cNvSpPr>
@@ -780,18 +690,13 @@
               <a:rPr lang="en-US"/>
               <a:t>Click to edit Master title style</a:t>
             </a:r>
-          </a:p>
-        </p:txBody>
-      </p:sp>
-      <p:sp>
-        <p:nvSpPr>
-          <p:cNvPr id="3" name="Content Placeholder 2">
-            <a:extLst>
-              <a:ext uri="{FF2B5EF4-FFF2-40B4-BE49-F238E27FC236}">
-                <a16:creationId xmlns:a16="http://schemas.microsoft.com/office/drawing/2014/main" id="{866C34D4-9742-AB78-9E67-E7DA4BE52816}"/>
-              </a:ext>
-            </a:extLst>
-          </p:cNvPr>
+            <a:endParaRPr lang="en-US" dirty="0"/>
+          </a:p>
+        </p:txBody>
+      </p:sp>
+      <p:sp>
+        <p:nvSpPr>
+          <p:cNvPr id="3" name="Content Placeholder 2"/>
           <p:cNvSpPr>
             <a:spLocks noGrp="1"/>
           </p:cNvSpPr>
@@ -837,18 +742,13 @@
               <a:rPr lang="en-US"/>
               <a:t>Fifth level</a:t>
             </a:r>
-          </a:p>
-        </p:txBody>
-      </p:sp>
-      <p:sp>
-        <p:nvSpPr>
-          <p:cNvPr id="4" name="Date Placeholder 3">
-            <a:extLst>
-              <a:ext uri="{FF2B5EF4-FFF2-40B4-BE49-F238E27FC236}">
-                <a16:creationId xmlns:a16="http://schemas.microsoft.com/office/drawing/2014/main" id="{B5014AB7-C896-6A2E-598C-4500882012DE}"/>
-              </a:ext>
-            </a:extLst>
-          </p:cNvPr>
+            <a:endParaRPr lang="en-US" dirty="0"/>
+          </a:p>
+        </p:txBody>
+      </p:sp>
+      <p:sp>
+        <p:nvSpPr>
+          <p:cNvPr id="4" name="Date Placeholder 3"/>
           <p:cNvSpPr>
             <a:spLocks noGrp="1"/>
           </p:cNvSpPr>
@@ -863,7 +763,7 @@
           <a:p>
             <a:fld id="{BE7A8A13-8D72-A04A-B2C1-C42F42AA96D9}" type="datetimeFigureOut">
               <a:rPr lang="en-US" smtClean="0"/>
-              <a:t>9/7/26</a:t>
+              <a:t>9/17/26</a:t>
             </a:fld>
             <a:endParaRPr lang="en-US"/>
           </a:p>
@@ -871,13 +771,7 @@
       </p:sp>
       <p:sp>
         <p:nvSpPr>
-          <p:cNvPr id="5" name="Footer Placeholder 4">
-            <a:extLst>
-              <a:ext uri="{FF2B5EF4-FFF2-40B4-BE49-F238E27FC236}">
-                <a16:creationId xmlns:a16="http://schemas.microsoft.com/office/drawing/2014/main" id="{D550DAFE-C0F7-AE16-AB1A-C164AC0130FC}"/>
-              </a:ext>
-            </a:extLst>
-          </p:cNvPr>
+          <p:cNvPr id="5" name="Footer Placeholder 4"/>
           <p:cNvSpPr>
             <a:spLocks noGrp="1"/>
           </p:cNvSpPr>
@@ -896,13 +790,7 @@
       </p:sp>
       <p:sp>
         <p:nvSpPr>
-          <p:cNvPr id="6" name="Slide Number Placeholder 5">
-            <a:extLst>
-              <a:ext uri="{FF2B5EF4-FFF2-40B4-BE49-F238E27FC236}">
-                <a16:creationId xmlns:a16="http://schemas.microsoft.com/office/drawing/2014/main" id="{3A173BB9-21E0-A881-CF15-65CB84399E51}"/>
-              </a:ext>
-            </a:extLst>
-          </p:cNvPr>
+          <p:cNvPr id="6" name="Slide Number Placeholder 5"/>
           <p:cNvSpPr>
             <a:spLocks noGrp="1"/>
           </p:cNvSpPr>
@@ -926,7 +814,7 @@
     </p:spTree>
     <p:extLst>
       <p:ext uri="{BB962C8B-B14F-4D97-AF65-F5344CB8AC3E}">
-        <p14:creationId xmlns:p14="http://schemas.microsoft.com/office/powerpoint/2010/main" val="3353252594"/>
+        <p14:creationId xmlns:p14="http://schemas.microsoft.com/office/powerpoint/2010/main" val="1879980800"/>
       </p:ext>
     </p:extLst>
   </p:cSld>
@@ -955,13 +843,7 @@
       </p:grpSpPr>
       <p:sp>
         <p:nvSpPr>
-          <p:cNvPr id="2" name="Title 1">
-            <a:extLst>
-              <a:ext uri="{FF2B5EF4-FFF2-40B4-BE49-F238E27FC236}">
-                <a16:creationId xmlns:a16="http://schemas.microsoft.com/office/drawing/2014/main" id="{9955D4D5-E7B8-E575-6F3B-C7DBF164FDDF}"/>
-              </a:ext>
-            </a:extLst>
-          </p:cNvPr>
+          <p:cNvPr id="2" name="Title 1"/>
           <p:cNvSpPr>
             <a:spLocks noGrp="1"/>
           </p:cNvSpPr>
@@ -971,15 +853,15 @@
         </p:nvSpPr>
         <p:spPr>
           <a:xfrm>
-            <a:off x="831850" y="1709738"/>
-            <a:ext cx="10515600" cy="2852737"/>
+            <a:off x="748665" y="911860"/>
+            <a:ext cx="9464040" cy="1521460"/>
           </a:xfrm>
         </p:spPr>
         <p:txBody>
           <a:bodyPr anchor="b"/>
           <a:lstStyle>
             <a:lvl1pPr>
-              <a:defRPr sz="6000"/>
+              <a:defRPr sz="3200"/>
             </a:lvl1pPr>
           </a:lstStyle>
           <a:p>
@@ -987,18 +869,13 @@
               <a:rPr lang="en-US"/>
               <a:t>Click to edit Master title style</a:t>
             </a:r>
-          </a:p>
-        </p:txBody>
-      </p:sp>
-      <p:sp>
-        <p:nvSpPr>
-          <p:cNvPr id="3" name="Text Placeholder 2">
-            <a:extLst>
-              <a:ext uri="{FF2B5EF4-FFF2-40B4-BE49-F238E27FC236}">
-                <a16:creationId xmlns:a16="http://schemas.microsoft.com/office/drawing/2014/main" id="{90368395-C6C2-5B12-1FD2-D0083E8EFE14}"/>
-              </a:ext>
-            </a:extLst>
-          </p:cNvPr>
+            <a:endParaRPr lang="en-US" dirty="0"/>
+          </a:p>
+        </p:txBody>
+      </p:sp>
+      <p:sp>
+        <p:nvSpPr>
+          <p:cNvPr id="3" name="Text Placeholder 2"/>
           <p:cNvSpPr>
             <a:spLocks noGrp="1"/>
           </p:cNvSpPr>
@@ -1008,8 +885,8 @@
         </p:nvSpPr>
         <p:spPr>
           <a:xfrm>
-            <a:off x="831850" y="4589463"/>
-            <a:ext cx="10515600" cy="1500187"/>
+            <a:off x="748665" y="2447714"/>
+            <a:ext cx="9464040" cy="800100"/>
           </a:xfrm>
         </p:spPr>
         <p:txBody>
@@ -1017,7 +894,7 @@
           <a:lstStyle>
             <a:lvl1pPr marL="0" indent="0">
               <a:buNone/>
-              <a:defRPr sz="2400">
+              <a:defRPr sz="1280">
                 <a:solidFill>
                   <a:schemeClr val="tx1">
                     <a:tint val="75000"/>
@@ -1025,9 +902,9 @@
                 </a:solidFill>
               </a:defRPr>
             </a:lvl1pPr>
-            <a:lvl2pPr marL="457200" indent="0">
-              <a:buNone/>
-              <a:defRPr sz="2000">
+            <a:lvl2pPr marL="243825" indent="0">
+              <a:buNone/>
+              <a:defRPr sz="1067">
                 <a:solidFill>
                   <a:schemeClr val="tx1">
                     <a:tint val="75000"/>
@@ -1035,9 +912,9 @@
                 </a:solidFill>
               </a:defRPr>
             </a:lvl2pPr>
-            <a:lvl3pPr marL="914400" indent="0">
-              <a:buNone/>
-              <a:defRPr sz="1800">
+            <a:lvl3pPr marL="487650" indent="0">
+              <a:buNone/>
+              <a:defRPr sz="960">
                 <a:solidFill>
                   <a:schemeClr val="tx1">
                     <a:tint val="75000"/>
@@ -1045,9 +922,9 @@
                 </a:solidFill>
               </a:defRPr>
             </a:lvl3pPr>
-            <a:lvl4pPr marL="1371600" indent="0">
-              <a:buNone/>
-              <a:defRPr sz="1600">
+            <a:lvl4pPr marL="731474" indent="0">
+              <a:buNone/>
+              <a:defRPr sz="853">
                 <a:solidFill>
                   <a:schemeClr val="tx1">
                     <a:tint val="75000"/>
@@ -1055,9 +932,9 @@
                 </a:solidFill>
               </a:defRPr>
             </a:lvl4pPr>
-            <a:lvl5pPr marL="1828800" indent="0">
-              <a:buNone/>
-              <a:defRPr sz="1600">
+            <a:lvl5pPr marL="975299" indent="0">
+              <a:buNone/>
+              <a:defRPr sz="853">
                 <a:solidFill>
                   <a:schemeClr val="tx1">
                     <a:tint val="75000"/>
@@ -1065,9 +942,9 @@
                 </a:solidFill>
               </a:defRPr>
             </a:lvl5pPr>
-            <a:lvl6pPr marL="2286000" indent="0">
-              <a:buNone/>
-              <a:defRPr sz="1600">
+            <a:lvl6pPr marL="1219124" indent="0">
+              <a:buNone/>
+              <a:defRPr sz="853">
                 <a:solidFill>
                   <a:schemeClr val="tx1">
                     <a:tint val="75000"/>
@@ -1075,9 +952,9 @@
                 </a:solidFill>
               </a:defRPr>
             </a:lvl6pPr>
-            <a:lvl7pPr marL="2743200" indent="0">
-              <a:buNone/>
-              <a:defRPr sz="1600">
+            <a:lvl7pPr marL="1462949" indent="0">
+              <a:buNone/>
+              <a:defRPr sz="853">
                 <a:solidFill>
                   <a:schemeClr val="tx1">
                     <a:tint val="75000"/>
@@ -1085,9 +962,9 @@
                 </a:solidFill>
               </a:defRPr>
             </a:lvl7pPr>
-            <a:lvl8pPr marL="3200400" indent="0">
-              <a:buNone/>
-              <a:defRPr sz="1600">
+            <a:lvl8pPr marL="1706773" indent="0">
+              <a:buNone/>
+              <a:defRPr sz="853">
                 <a:solidFill>
                   <a:schemeClr val="tx1">
                     <a:tint val="75000"/>
@@ -1095,9 +972,9 @@
                 </a:solidFill>
               </a:defRPr>
             </a:lvl8pPr>
-            <a:lvl9pPr marL="3657600" indent="0">
-              <a:buNone/>
-              <a:defRPr sz="1600">
+            <a:lvl9pPr marL="1950598" indent="0">
+              <a:buNone/>
+              <a:defRPr sz="853">
                 <a:solidFill>
                   <a:schemeClr val="tx1">
                     <a:tint val="75000"/>
@@ -1117,13 +994,7 @@
       </p:sp>
       <p:sp>
         <p:nvSpPr>
-          <p:cNvPr id="4" name="Date Placeholder 3">
-            <a:extLst>
-              <a:ext uri="{FF2B5EF4-FFF2-40B4-BE49-F238E27FC236}">
-                <a16:creationId xmlns:a16="http://schemas.microsoft.com/office/drawing/2014/main" id="{AB1C6AA0-929F-B58C-9BF5-B9DF99DC4DCE}"/>
-              </a:ext>
-            </a:extLst>
-          </p:cNvPr>
+          <p:cNvPr id="4" name="Date Placeholder 3"/>
           <p:cNvSpPr>
             <a:spLocks noGrp="1"/>
           </p:cNvSpPr>
@@ -1138,7 +1009,7 @@
           <a:p>
             <a:fld id="{BE7A8A13-8D72-A04A-B2C1-C42F42AA96D9}" type="datetimeFigureOut">
               <a:rPr lang="en-US" smtClean="0"/>
-              <a:t>9/7/26</a:t>
+              <a:t>9/17/26</a:t>
             </a:fld>
             <a:endParaRPr lang="en-US"/>
           </a:p>
@@ -1146,13 +1017,7 @@
       </p:sp>
       <p:sp>
         <p:nvSpPr>
-          <p:cNvPr id="5" name="Footer Placeholder 4">
-            <a:extLst>
-              <a:ext uri="{FF2B5EF4-FFF2-40B4-BE49-F238E27FC236}">
-                <a16:creationId xmlns:a16="http://schemas.microsoft.com/office/drawing/2014/main" id="{FD602164-B704-E27A-779B-E5F242D9AC0E}"/>
-              </a:ext>
-            </a:extLst>
-          </p:cNvPr>
+          <p:cNvPr id="5" name="Footer Placeholder 4"/>
           <p:cNvSpPr>
             <a:spLocks noGrp="1"/>
           </p:cNvSpPr>
@@ -1171,13 +1036,7 @@
       </p:sp>
       <p:sp>
         <p:nvSpPr>
-          <p:cNvPr id="6" name="Slide Number Placeholder 5">
-            <a:extLst>
-              <a:ext uri="{FF2B5EF4-FFF2-40B4-BE49-F238E27FC236}">
-                <a16:creationId xmlns:a16="http://schemas.microsoft.com/office/drawing/2014/main" id="{8926B847-0BCE-3A25-EEB5-E5670B736A30}"/>
-              </a:ext>
-            </a:extLst>
-          </p:cNvPr>
+          <p:cNvPr id="6" name="Slide Number Placeholder 5"/>
           <p:cNvSpPr>
             <a:spLocks noGrp="1"/>
           </p:cNvSpPr>
@@ -1201,7 +1060,7 @@
     </p:spTree>
     <p:extLst>
       <p:ext uri="{BB962C8B-B14F-4D97-AF65-F5344CB8AC3E}">
-        <p14:creationId xmlns:p14="http://schemas.microsoft.com/office/powerpoint/2010/main" val="1437854367"/>
+        <p14:creationId xmlns:p14="http://schemas.microsoft.com/office/powerpoint/2010/main" val="2424349823"/>
       </p:ext>
     </p:extLst>
   </p:cSld>
@@ -1230,13 +1089,7 @@
       </p:grpSpPr>
       <p:sp>
         <p:nvSpPr>
-          <p:cNvPr id="2" name="Title 1">
-            <a:extLst>
-              <a:ext uri="{FF2B5EF4-FFF2-40B4-BE49-F238E27FC236}">
-                <a16:creationId xmlns:a16="http://schemas.microsoft.com/office/drawing/2014/main" id="{08D97C7B-6524-8D44-52C9-E1C7AA9E8940}"/>
-              </a:ext>
-            </a:extLst>
-          </p:cNvPr>
+          <p:cNvPr id="2" name="Title 1"/>
           <p:cNvSpPr>
             <a:spLocks noGrp="1"/>
           </p:cNvSpPr>
@@ -1253,18 +1106,13 @@
               <a:rPr lang="en-US"/>
               <a:t>Click to edit Master title style</a:t>
             </a:r>
-          </a:p>
-        </p:txBody>
-      </p:sp>
-      <p:sp>
-        <p:nvSpPr>
-          <p:cNvPr id="3" name="Content Placeholder 2">
-            <a:extLst>
-              <a:ext uri="{FF2B5EF4-FFF2-40B4-BE49-F238E27FC236}">
-                <a16:creationId xmlns:a16="http://schemas.microsoft.com/office/drawing/2014/main" id="{38E24EF7-78BA-35AC-4875-D3BB3EB10225}"/>
-              </a:ext>
-            </a:extLst>
-          </p:cNvPr>
+            <a:endParaRPr lang="en-US" dirty="0"/>
+          </a:p>
+        </p:txBody>
+      </p:sp>
+      <p:sp>
+        <p:nvSpPr>
+          <p:cNvPr id="3" name="Content Placeholder 2"/>
           <p:cNvSpPr>
             <a:spLocks noGrp="1"/>
           </p:cNvSpPr>
@@ -1274,8 +1122,8 @@
         </p:nvSpPr>
         <p:spPr>
           <a:xfrm>
-            <a:off x="838200" y="1825625"/>
-            <a:ext cx="5181600" cy="4351338"/>
+            <a:off x="754380" y="973666"/>
+            <a:ext cx="4663440" cy="2320714"/>
           </a:xfrm>
         </p:spPr>
         <p:txBody>
@@ -1315,18 +1163,13 @@
               <a:rPr lang="en-US"/>
               <a:t>Fifth level</a:t>
             </a:r>
-          </a:p>
-        </p:txBody>
-      </p:sp>
-      <p:sp>
-        <p:nvSpPr>
-          <p:cNvPr id="4" name="Content Placeholder 3">
-            <a:extLst>
-              <a:ext uri="{FF2B5EF4-FFF2-40B4-BE49-F238E27FC236}">
-                <a16:creationId xmlns:a16="http://schemas.microsoft.com/office/drawing/2014/main" id="{BADC7092-5C6A-90FD-0FE7-8FD6853B7D4C}"/>
-              </a:ext>
-            </a:extLst>
-          </p:cNvPr>
+            <a:endParaRPr lang="en-US" dirty="0"/>
+          </a:p>
+        </p:txBody>
+      </p:sp>
+      <p:sp>
+        <p:nvSpPr>
+          <p:cNvPr id="4" name="Content Placeholder 3"/>
           <p:cNvSpPr>
             <a:spLocks noGrp="1"/>
           </p:cNvSpPr>
@@ -1336,8 +1179,8 @@
         </p:nvSpPr>
         <p:spPr>
           <a:xfrm>
-            <a:off x="6172200" y="1825625"/>
-            <a:ext cx="5181600" cy="4351338"/>
+            <a:off x="5554980" y="973666"/>
+            <a:ext cx="4663440" cy="2320714"/>
           </a:xfrm>
         </p:spPr>
         <p:txBody>
@@ -1377,18 +1220,13 @@
               <a:rPr lang="en-US"/>
               <a:t>Fifth level</a:t>
             </a:r>
-          </a:p>
-        </p:txBody>
-      </p:sp>
-      <p:sp>
-        <p:nvSpPr>
-          <p:cNvPr id="5" name="Date Placeholder 4">
-            <a:extLst>
-              <a:ext uri="{FF2B5EF4-FFF2-40B4-BE49-F238E27FC236}">
-                <a16:creationId xmlns:a16="http://schemas.microsoft.com/office/drawing/2014/main" id="{BBB95323-C543-9739-B2C5-F0AC2A888E72}"/>
-              </a:ext>
-            </a:extLst>
-          </p:cNvPr>
+            <a:endParaRPr lang="en-US" dirty="0"/>
+          </a:p>
+        </p:txBody>
+      </p:sp>
+      <p:sp>
+        <p:nvSpPr>
+          <p:cNvPr id="5" name="Date Placeholder 4"/>
           <p:cNvSpPr>
             <a:spLocks noGrp="1"/>
           </p:cNvSpPr>
@@ -1403,7 +1241,7 @@
           <a:p>
             <a:fld id="{BE7A8A13-8D72-A04A-B2C1-C42F42AA96D9}" type="datetimeFigureOut">
               <a:rPr lang="en-US" smtClean="0"/>
-              <a:t>9/7/26</a:t>
+              <a:t>9/17/26</a:t>
             </a:fld>
             <a:endParaRPr lang="en-US"/>
           </a:p>
@@ -1411,13 +1249,7 @@
       </p:sp>
       <p:sp>
         <p:nvSpPr>
-          <p:cNvPr id="6" name="Footer Placeholder 5">
-            <a:extLst>
-              <a:ext uri="{FF2B5EF4-FFF2-40B4-BE49-F238E27FC236}">
-                <a16:creationId xmlns:a16="http://schemas.microsoft.com/office/drawing/2014/main" id="{BC7BEE9D-D2B4-A9C6-7473-5B7036B583A9}"/>
-              </a:ext>
-            </a:extLst>
-          </p:cNvPr>
+          <p:cNvPr id="6" name="Footer Placeholder 5"/>
           <p:cNvSpPr>
             <a:spLocks noGrp="1"/>
           </p:cNvSpPr>
@@ -1436,13 +1268,7 @@
       </p:sp>
       <p:sp>
         <p:nvSpPr>
-          <p:cNvPr id="7" name="Slide Number Placeholder 6">
-            <a:extLst>
-              <a:ext uri="{FF2B5EF4-FFF2-40B4-BE49-F238E27FC236}">
-                <a16:creationId xmlns:a16="http://schemas.microsoft.com/office/drawing/2014/main" id="{9CF4846E-CF19-8D40-2390-5A4F6B80DC64}"/>
-              </a:ext>
-            </a:extLst>
-          </p:cNvPr>
+          <p:cNvPr id="7" name="Slide Number Placeholder 6"/>
           <p:cNvSpPr>
             <a:spLocks noGrp="1"/>
           </p:cNvSpPr>
@@ -1466,7 +1292,7 @@
     </p:spTree>
     <p:extLst>
       <p:ext uri="{BB962C8B-B14F-4D97-AF65-F5344CB8AC3E}">
-        <p14:creationId xmlns:p14="http://schemas.microsoft.com/office/powerpoint/2010/main" val="4012777605"/>
+        <p14:creationId xmlns:p14="http://schemas.microsoft.com/office/powerpoint/2010/main" val="767679975"/>
       </p:ext>
     </p:extLst>
   </p:cSld>
@@ -1495,13 +1321,7 @@
       </p:grpSpPr>
       <p:sp>
         <p:nvSpPr>
-          <p:cNvPr id="2" name="Title 1">
-            <a:extLst>
-              <a:ext uri="{FF2B5EF4-FFF2-40B4-BE49-F238E27FC236}">
-                <a16:creationId xmlns:a16="http://schemas.microsoft.com/office/drawing/2014/main" id="{73AC7645-FB04-4A53-4448-00EEDE773EA3}"/>
-              </a:ext>
-            </a:extLst>
-          </p:cNvPr>
+          <p:cNvPr id="2" name="Title 1"/>
           <p:cNvSpPr>
             <a:spLocks noGrp="1"/>
           </p:cNvSpPr>
@@ -1511,8 +1331,8 @@
         </p:nvSpPr>
         <p:spPr>
           <a:xfrm>
-            <a:off x="839788" y="365125"/>
-            <a:ext cx="10515600" cy="1325563"/>
+            <a:off x="755809" y="194734"/>
+            <a:ext cx="9464040" cy="706967"/>
           </a:xfrm>
         </p:spPr>
         <p:txBody>
@@ -1523,18 +1343,13 @@
               <a:rPr lang="en-US"/>
               <a:t>Click to edit Master title style</a:t>
             </a:r>
-          </a:p>
-        </p:txBody>
-      </p:sp>
-      <p:sp>
-        <p:nvSpPr>
-          <p:cNvPr id="3" name="Text Placeholder 2">
-            <a:extLst>
-              <a:ext uri="{FF2B5EF4-FFF2-40B4-BE49-F238E27FC236}">
-                <a16:creationId xmlns:a16="http://schemas.microsoft.com/office/drawing/2014/main" id="{F9F950CF-0285-D19E-01FB-39E206B6A536}"/>
-              </a:ext>
-            </a:extLst>
-          </p:cNvPr>
+            <a:endParaRPr lang="en-US" dirty="0"/>
+          </a:p>
+        </p:txBody>
+      </p:sp>
+      <p:sp>
+        <p:nvSpPr>
+          <p:cNvPr id="3" name="Text Placeholder 2"/>
           <p:cNvSpPr>
             <a:spLocks noGrp="1"/>
           </p:cNvSpPr>
@@ -1544,8 +1359,8 @@
         </p:nvSpPr>
         <p:spPr>
           <a:xfrm>
-            <a:off x="839788" y="1681163"/>
-            <a:ext cx="5157787" cy="823912"/>
+            <a:off x="755810" y="896620"/>
+            <a:ext cx="4642008" cy="439420"/>
           </a:xfrm>
         </p:spPr>
         <p:txBody>
@@ -1553,39 +1368,39 @@
           <a:lstStyle>
             <a:lvl1pPr marL="0" indent="0">
               <a:buNone/>
-              <a:defRPr sz="2400" b="1"/>
+              <a:defRPr sz="1280" b="1"/>
             </a:lvl1pPr>
-            <a:lvl2pPr marL="457200" indent="0">
-              <a:buNone/>
-              <a:defRPr sz="2000" b="1"/>
+            <a:lvl2pPr marL="243825" indent="0">
+              <a:buNone/>
+              <a:defRPr sz="1067" b="1"/>
             </a:lvl2pPr>
-            <a:lvl3pPr marL="914400" indent="0">
-              <a:buNone/>
-              <a:defRPr sz="1800" b="1"/>
+            <a:lvl3pPr marL="487650" indent="0">
+              <a:buNone/>
+              <a:defRPr sz="960" b="1"/>
             </a:lvl3pPr>
-            <a:lvl4pPr marL="1371600" indent="0">
-              <a:buNone/>
-              <a:defRPr sz="1600" b="1"/>
+            <a:lvl4pPr marL="731474" indent="0">
+              <a:buNone/>
+              <a:defRPr sz="853" b="1"/>
             </a:lvl4pPr>
-            <a:lvl5pPr marL="1828800" indent="0">
-              <a:buNone/>
-              <a:defRPr sz="1600" b="1"/>
+            <a:lvl5pPr marL="975299" indent="0">
+              <a:buNone/>
+              <a:defRPr sz="853" b="1"/>
             </a:lvl5pPr>
-            <a:lvl6pPr marL="2286000" indent="0">
-              <a:buNone/>
-              <a:defRPr sz="1600" b="1"/>
+            <a:lvl6pPr marL="1219124" indent="0">
+              <a:buNone/>
+              <a:defRPr sz="853" b="1"/>
             </a:lvl6pPr>
-            <a:lvl7pPr marL="2743200" indent="0">
-              <a:buNone/>
-              <a:defRPr sz="1600" b="1"/>
+            <a:lvl7pPr marL="1462949" indent="0">
+              <a:buNone/>
+              <a:defRPr sz="853" b="1"/>
             </a:lvl7pPr>
-            <a:lvl8pPr marL="3200400" indent="0">
-              <a:buNone/>
-              <a:defRPr sz="1600" b="1"/>
+            <a:lvl8pPr marL="1706773" indent="0">
+              <a:buNone/>
+              <a:defRPr sz="853" b="1"/>
             </a:lvl8pPr>
-            <a:lvl9pPr marL="3657600" indent="0">
-              <a:buNone/>
-              <a:defRPr sz="1600" b="1"/>
+            <a:lvl9pPr marL="1950598" indent="0">
+              <a:buNone/>
+              <a:defRPr sz="853" b="1"/>
             </a:lvl9pPr>
           </a:lstStyle>
           <a:p>
@@ -1599,13 +1414,7 @@
       </p:sp>
       <p:sp>
         <p:nvSpPr>
-          <p:cNvPr id="4" name="Content Placeholder 3">
-            <a:extLst>
-              <a:ext uri="{FF2B5EF4-FFF2-40B4-BE49-F238E27FC236}">
-                <a16:creationId xmlns:a16="http://schemas.microsoft.com/office/drawing/2014/main" id="{E701D14F-EF46-730F-4687-9FA8CDC4896F}"/>
-              </a:ext>
-            </a:extLst>
-          </p:cNvPr>
+          <p:cNvPr id="4" name="Content Placeholder 3"/>
           <p:cNvSpPr>
             <a:spLocks noGrp="1"/>
           </p:cNvSpPr>
@@ -1615,8 +1424,8 @@
         </p:nvSpPr>
         <p:spPr>
           <a:xfrm>
-            <a:off x="839788" y="2505075"/>
-            <a:ext cx="5157787" cy="3684588"/>
+            <a:off x="755810" y="1336040"/>
+            <a:ext cx="4642008" cy="1965114"/>
           </a:xfrm>
         </p:spPr>
         <p:txBody>
@@ -1656,18 +1465,13 @@
               <a:rPr lang="en-US"/>
               <a:t>Fifth level</a:t>
             </a:r>
-          </a:p>
-        </p:txBody>
-      </p:sp>
-      <p:sp>
-        <p:nvSpPr>
-          <p:cNvPr id="5" name="Text Placeholder 4">
-            <a:extLst>
-              <a:ext uri="{FF2B5EF4-FFF2-40B4-BE49-F238E27FC236}">
-                <a16:creationId xmlns:a16="http://schemas.microsoft.com/office/drawing/2014/main" id="{63EB78B4-1D67-421D-A2D4-A67966B29E79}"/>
-              </a:ext>
-            </a:extLst>
-          </p:cNvPr>
+            <a:endParaRPr lang="en-US" dirty="0"/>
+          </a:p>
+        </p:txBody>
+      </p:sp>
+      <p:sp>
+        <p:nvSpPr>
+          <p:cNvPr id="5" name="Text Placeholder 4"/>
           <p:cNvSpPr>
             <a:spLocks noGrp="1"/>
           </p:cNvSpPr>
@@ -1677,8 +1481,8 @@
         </p:nvSpPr>
         <p:spPr>
           <a:xfrm>
-            <a:off x="6172200" y="1681163"/>
-            <a:ext cx="5183188" cy="823912"/>
+            <a:off x="5554980" y="896620"/>
+            <a:ext cx="4664869" cy="439420"/>
           </a:xfrm>
         </p:spPr>
         <p:txBody>
@@ -1686,39 +1490,39 @@
           <a:lstStyle>
             <a:lvl1pPr marL="0" indent="0">
               <a:buNone/>
-              <a:defRPr sz="2400" b="1"/>
+              <a:defRPr sz="1280" b="1"/>
             </a:lvl1pPr>
-            <a:lvl2pPr marL="457200" indent="0">
-              <a:buNone/>
-              <a:defRPr sz="2000" b="1"/>
+            <a:lvl2pPr marL="243825" indent="0">
+              <a:buNone/>
+              <a:defRPr sz="1067" b="1"/>
             </a:lvl2pPr>
-            <a:lvl3pPr marL="914400" indent="0">
-              <a:buNone/>
-              <a:defRPr sz="1800" b="1"/>
+            <a:lvl3pPr marL="487650" indent="0">
+              <a:buNone/>
+              <a:defRPr sz="960" b="1"/>
             </a:lvl3pPr>
-            <a:lvl4pPr marL="1371600" indent="0">
-              <a:buNone/>
-              <a:defRPr sz="1600" b="1"/>
+            <a:lvl4pPr marL="731474" indent="0">
+              <a:buNone/>
+              <a:defRPr sz="853" b="1"/>
             </a:lvl4pPr>
-            <a:lvl5pPr marL="1828800" indent="0">
-              <a:buNone/>
-              <a:defRPr sz="1600" b="1"/>
+            <a:lvl5pPr marL="975299" indent="0">
+              <a:buNone/>
+              <a:defRPr sz="853" b="1"/>
             </a:lvl5pPr>
-            <a:lvl6pPr marL="2286000" indent="0">
-              <a:buNone/>
-              <a:defRPr sz="1600" b="1"/>
+            <a:lvl6pPr marL="1219124" indent="0">
+              <a:buNone/>
+              <a:defRPr sz="853" b="1"/>
             </a:lvl6pPr>
-            <a:lvl7pPr marL="2743200" indent="0">
-              <a:buNone/>
-              <a:defRPr sz="1600" b="1"/>
+            <a:lvl7pPr marL="1462949" indent="0">
+              <a:buNone/>
+              <a:defRPr sz="853" b="1"/>
             </a:lvl7pPr>
-            <a:lvl8pPr marL="3200400" indent="0">
-              <a:buNone/>
-              <a:defRPr sz="1600" b="1"/>
+            <a:lvl8pPr marL="1706773" indent="0">
+              <a:buNone/>
+              <a:defRPr sz="853" b="1"/>
             </a:lvl8pPr>
-            <a:lvl9pPr marL="3657600" indent="0">
-              <a:buNone/>
-              <a:defRPr sz="1600" b="1"/>
+            <a:lvl9pPr marL="1950598" indent="0">
+              <a:buNone/>
+              <a:defRPr sz="853" b="1"/>
             </a:lvl9pPr>
           </a:lstStyle>
           <a:p>
@@ -1732,13 +1536,7 @@
       </p:sp>
       <p:sp>
         <p:nvSpPr>
-          <p:cNvPr id="6" name="Content Placeholder 5">
-            <a:extLst>
-              <a:ext uri="{FF2B5EF4-FFF2-40B4-BE49-F238E27FC236}">
-                <a16:creationId xmlns:a16="http://schemas.microsoft.com/office/drawing/2014/main" id="{D2606002-AF24-D2B5-BFBF-C8F6536F3133}"/>
-              </a:ext>
-            </a:extLst>
-          </p:cNvPr>
+          <p:cNvPr id="6" name="Content Placeholder 5"/>
           <p:cNvSpPr>
             <a:spLocks noGrp="1"/>
           </p:cNvSpPr>
@@ -1748,8 +1546,8 @@
         </p:nvSpPr>
         <p:spPr>
           <a:xfrm>
-            <a:off x="6172200" y="2505075"/>
-            <a:ext cx="5183188" cy="3684588"/>
+            <a:off x="5554980" y="1336040"/>
+            <a:ext cx="4664869" cy="1965114"/>
           </a:xfrm>
         </p:spPr>
         <p:txBody>
@@ -1789,18 +1587,13 @@
               <a:rPr lang="en-US"/>
               <a:t>Fifth level</a:t>
             </a:r>
-          </a:p>
-        </p:txBody>
-      </p:sp>
-      <p:sp>
-        <p:nvSpPr>
-          <p:cNvPr id="7" name="Date Placeholder 6">
-            <a:extLst>
-              <a:ext uri="{FF2B5EF4-FFF2-40B4-BE49-F238E27FC236}">
-                <a16:creationId xmlns:a16="http://schemas.microsoft.com/office/drawing/2014/main" id="{471EC72A-93BB-BE49-679B-2788EDB4E6B5}"/>
-              </a:ext>
-            </a:extLst>
-          </p:cNvPr>
+            <a:endParaRPr lang="en-US" dirty="0"/>
+          </a:p>
+        </p:txBody>
+      </p:sp>
+      <p:sp>
+        <p:nvSpPr>
+          <p:cNvPr id="7" name="Date Placeholder 6"/>
           <p:cNvSpPr>
             <a:spLocks noGrp="1"/>
           </p:cNvSpPr>
@@ -1815,7 +1608,7 @@
           <a:p>
             <a:fld id="{BE7A8A13-8D72-A04A-B2C1-C42F42AA96D9}" type="datetimeFigureOut">
               <a:rPr lang="en-US" smtClean="0"/>
-              <a:t>9/7/26</a:t>
+              <a:t>9/17/26</a:t>
             </a:fld>
             <a:endParaRPr lang="en-US"/>
           </a:p>
@@ -1823,13 +1616,7 @@
       </p:sp>
       <p:sp>
         <p:nvSpPr>
-          <p:cNvPr id="8" name="Footer Placeholder 7">
-            <a:extLst>
-              <a:ext uri="{FF2B5EF4-FFF2-40B4-BE49-F238E27FC236}">
-                <a16:creationId xmlns:a16="http://schemas.microsoft.com/office/drawing/2014/main" id="{FB26F353-B0C1-A7D1-60D9-5C0694B5B65B}"/>
-              </a:ext>
-            </a:extLst>
-          </p:cNvPr>
+          <p:cNvPr id="8" name="Footer Placeholder 7"/>
           <p:cNvSpPr>
             <a:spLocks noGrp="1"/>
           </p:cNvSpPr>
@@ -1848,13 +1635,7 @@
       </p:sp>
       <p:sp>
         <p:nvSpPr>
-          <p:cNvPr id="9" name="Slide Number Placeholder 8">
-            <a:extLst>
-              <a:ext uri="{FF2B5EF4-FFF2-40B4-BE49-F238E27FC236}">
-                <a16:creationId xmlns:a16="http://schemas.microsoft.com/office/drawing/2014/main" id="{88C6C7A1-1A82-2BD9-4A0B-0DADB42E2746}"/>
-              </a:ext>
-            </a:extLst>
-          </p:cNvPr>
+          <p:cNvPr id="9" name="Slide Number Placeholder 8"/>
           <p:cNvSpPr>
             <a:spLocks noGrp="1"/>
           </p:cNvSpPr>
@@ -1878,7 +1659,7 @@
     </p:spTree>
     <p:extLst>
       <p:ext uri="{BB962C8B-B14F-4D97-AF65-F5344CB8AC3E}">
-        <p14:creationId xmlns:p14="http://schemas.microsoft.com/office/powerpoint/2010/main" val="1346990209"/>
+        <p14:creationId xmlns:p14="http://schemas.microsoft.com/office/powerpoint/2010/main" val="4142429654"/>
       </p:ext>
     </p:extLst>
   </p:cSld>
@@ -1907,13 +1688,7 @@
       </p:grpSpPr>
       <p:sp>
         <p:nvSpPr>
-          <p:cNvPr id="2" name="Title 1">
-            <a:extLst>
-              <a:ext uri="{FF2B5EF4-FFF2-40B4-BE49-F238E27FC236}">
-                <a16:creationId xmlns:a16="http://schemas.microsoft.com/office/drawing/2014/main" id="{5AD76F75-844D-F11F-5ED5-5CE3CE7AF87C}"/>
-              </a:ext>
-            </a:extLst>
-          </p:cNvPr>
+          <p:cNvPr id="2" name="Title 1"/>
           <p:cNvSpPr>
             <a:spLocks noGrp="1"/>
           </p:cNvSpPr>
@@ -1930,18 +1705,13 @@
               <a:rPr lang="en-US"/>
               <a:t>Click to edit Master title style</a:t>
             </a:r>
-          </a:p>
-        </p:txBody>
-      </p:sp>
-      <p:sp>
-        <p:nvSpPr>
-          <p:cNvPr id="3" name="Date Placeholder 2">
-            <a:extLst>
-              <a:ext uri="{FF2B5EF4-FFF2-40B4-BE49-F238E27FC236}">
-                <a16:creationId xmlns:a16="http://schemas.microsoft.com/office/drawing/2014/main" id="{3D84CCD1-ED69-78B0-C764-4DC19FABCF26}"/>
-              </a:ext>
-            </a:extLst>
-          </p:cNvPr>
+            <a:endParaRPr lang="en-US" dirty="0"/>
+          </a:p>
+        </p:txBody>
+      </p:sp>
+      <p:sp>
+        <p:nvSpPr>
+          <p:cNvPr id="3" name="Date Placeholder 2"/>
           <p:cNvSpPr>
             <a:spLocks noGrp="1"/>
           </p:cNvSpPr>
@@ -1956,7 +1726,7 @@
           <a:p>
             <a:fld id="{BE7A8A13-8D72-A04A-B2C1-C42F42AA96D9}" type="datetimeFigureOut">
               <a:rPr lang="en-US" smtClean="0"/>
-              <a:t>9/7/26</a:t>
+              <a:t>9/17/26</a:t>
             </a:fld>
             <a:endParaRPr lang="en-US"/>
           </a:p>
@@ -1964,13 +1734,7 @@
       </p:sp>
       <p:sp>
         <p:nvSpPr>
-          <p:cNvPr id="4" name="Footer Placeholder 3">
-            <a:extLst>
-              <a:ext uri="{FF2B5EF4-FFF2-40B4-BE49-F238E27FC236}">
-                <a16:creationId xmlns:a16="http://schemas.microsoft.com/office/drawing/2014/main" id="{19BBC42F-62A7-436A-9651-BD48CF93E564}"/>
-              </a:ext>
-            </a:extLst>
-          </p:cNvPr>
+          <p:cNvPr id="4" name="Footer Placeholder 3"/>
           <p:cNvSpPr>
             <a:spLocks noGrp="1"/>
           </p:cNvSpPr>
@@ -1989,13 +1753,7 @@
       </p:sp>
       <p:sp>
         <p:nvSpPr>
-          <p:cNvPr id="5" name="Slide Number Placeholder 4">
-            <a:extLst>
-              <a:ext uri="{FF2B5EF4-FFF2-40B4-BE49-F238E27FC236}">
-                <a16:creationId xmlns:a16="http://schemas.microsoft.com/office/drawing/2014/main" id="{9A41DBD4-629C-6A40-96B4-4BF9B0BDD8EC}"/>
-              </a:ext>
-            </a:extLst>
-          </p:cNvPr>
+          <p:cNvPr id="5" name="Slide Number Placeholder 4"/>
           <p:cNvSpPr>
             <a:spLocks noGrp="1"/>
           </p:cNvSpPr>
@@ -2019,7 +1777,7 @@
     </p:spTree>
     <p:extLst>
       <p:ext uri="{BB962C8B-B14F-4D97-AF65-F5344CB8AC3E}">
-        <p14:creationId xmlns:p14="http://schemas.microsoft.com/office/powerpoint/2010/main" val="2964930375"/>
+        <p14:creationId xmlns:p14="http://schemas.microsoft.com/office/powerpoint/2010/main" val="4182258209"/>
       </p:ext>
     </p:extLst>
   </p:cSld>
@@ -2048,13 +1806,7 @@
       </p:grpSpPr>
       <p:sp>
         <p:nvSpPr>
-          <p:cNvPr id="2" name="Date Placeholder 1">
-            <a:extLst>
-              <a:ext uri="{FF2B5EF4-FFF2-40B4-BE49-F238E27FC236}">
-                <a16:creationId xmlns:a16="http://schemas.microsoft.com/office/drawing/2014/main" id="{9C6BFFB5-CC78-0525-500E-6E73B5757155}"/>
-              </a:ext>
-            </a:extLst>
-          </p:cNvPr>
+          <p:cNvPr id="2" name="Date Placeholder 1"/>
           <p:cNvSpPr>
             <a:spLocks noGrp="1"/>
           </p:cNvSpPr>
@@ -2069,7 +1821,7 @@
           <a:p>
             <a:fld id="{BE7A8A13-8D72-A04A-B2C1-C42F42AA96D9}" type="datetimeFigureOut">
               <a:rPr lang="en-US" smtClean="0"/>
-              <a:t>9/7/26</a:t>
+              <a:t>9/17/26</a:t>
             </a:fld>
             <a:endParaRPr lang="en-US"/>
           </a:p>
@@ -2077,13 +1829,7 @@
       </p:sp>
       <p:sp>
         <p:nvSpPr>
-          <p:cNvPr id="3" name="Footer Placeholder 2">
-            <a:extLst>
-              <a:ext uri="{FF2B5EF4-FFF2-40B4-BE49-F238E27FC236}">
-                <a16:creationId xmlns:a16="http://schemas.microsoft.com/office/drawing/2014/main" id="{94C1FC34-F827-8AD0-3DEC-EFF39B073C0D}"/>
-              </a:ext>
-            </a:extLst>
-          </p:cNvPr>
+          <p:cNvPr id="3" name="Footer Placeholder 2"/>
           <p:cNvSpPr>
             <a:spLocks noGrp="1"/>
           </p:cNvSpPr>
@@ -2102,13 +1848,7 @@
       </p:sp>
       <p:sp>
         <p:nvSpPr>
-          <p:cNvPr id="4" name="Slide Number Placeholder 3">
-            <a:extLst>
-              <a:ext uri="{FF2B5EF4-FFF2-40B4-BE49-F238E27FC236}">
-                <a16:creationId xmlns:a16="http://schemas.microsoft.com/office/drawing/2014/main" id="{1E5DCD82-0AE8-5419-E964-F2FD1BE3B651}"/>
-              </a:ext>
-            </a:extLst>
-          </p:cNvPr>
+          <p:cNvPr id="4" name="Slide Number Placeholder 3"/>
           <p:cNvSpPr>
             <a:spLocks noGrp="1"/>
           </p:cNvSpPr>
@@ -2132,7 +1872,7 @@
     </p:spTree>
     <p:extLst>
       <p:ext uri="{BB962C8B-B14F-4D97-AF65-F5344CB8AC3E}">
-        <p14:creationId xmlns:p14="http://schemas.microsoft.com/office/powerpoint/2010/main" val="3112357922"/>
+        <p14:creationId xmlns:p14="http://schemas.microsoft.com/office/powerpoint/2010/main" val="3959081850"/>
       </p:ext>
     </p:extLst>
   </p:cSld>
@@ -2161,13 +1901,7 @@
       </p:grpSpPr>
       <p:sp>
         <p:nvSpPr>
-          <p:cNvPr id="2" name="Title 1">
-            <a:extLst>
-              <a:ext uri="{FF2B5EF4-FFF2-40B4-BE49-F238E27FC236}">
-                <a16:creationId xmlns:a16="http://schemas.microsoft.com/office/drawing/2014/main" id="{EF9947B0-FD25-C6B7-2FEE-D1CF0D0D2664}"/>
-              </a:ext>
-            </a:extLst>
-          </p:cNvPr>
+          <p:cNvPr id="2" name="Title 1"/>
           <p:cNvSpPr>
             <a:spLocks noGrp="1"/>
           </p:cNvSpPr>
@@ -2177,15 +1911,15 @@
         </p:nvSpPr>
         <p:spPr>
           <a:xfrm>
-            <a:off x="839788" y="457200"/>
-            <a:ext cx="3932237" cy="1600200"/>
+            <a:off x="755810" y="243840"/>
+            <a:ext cx="3539013" cy="853440"/>
           </a:xfrm>
         </p:spPr>
         <p:txBody>
           <a:bodyPr anchor="b"/>
           <a:lstStyle>
             <a:lvl1pPr>
-              <a:defRPr sz="3200"/>
+              <a:defRPr sz="1707"/>
             </a:lvl1pPr>
           </a:lstStyle>
           <a:p>
@@ -2193,18 +1927,13 @@
               <a:rPr lang="en-US"/>
               <a:t>Click to edit Master title style</a:t>
             </a:r>
-          </a:p>
-        </p:txBody>
-      </p:sp>
-      <p:sp>
-        <p:nvSpPr>
-          <p:cNvPr id="3" name="Content Placeholder 2">
-            <a:extLst>
-              <a:ext uri="{FF2B5EF4-FFF2-40B4-BE49-F238E27FC236}">
-                <a16:creationId xmlns:a16="http://schemas.microsoft.com/office/drawing/2014/main" id="{3CAFDCFC-59E9-0E6D-0F15-089B664DC72D}"/>
-              </a:ext>
-            </a:extLst>
-          </p:cNvPr>
+            <a:endParaRPr lang="en-US" dirty="0"/>
+          </a:p>
+        </p:txBody>
+      </p:sp>
+      <p:sp>
+        <p:nvSpPr>
+          <p:cNvPr id="3" name="Content Placeholder 2"/>
           <p:cNvSpPr>
             <a:spLocks noGrp="1"/>
           </p:cNvSpPr>
@@ -2214,39 +1943,39 @@
         </p:nvSpPr>
         <p:spPr>
           <a:xfrm>
-            <a:off x="5183188" y="987425"/>
-            <a:ext cx="6172200" cy="4873625"/>
+            <a:off x="4664869" y="526627"/>
+            <a:ext cx="5554980" cy="2599267"/>
           </a:xfrm>
         </p:spPr>
         <p:txBody>
           <a:bodyPr/>
           <a:lstStyle>
             <a:lvl1pPr>
-              <a:defRPr sz="3200"/>
+              <a:defRPr sz="1707"/>
             </a:lvl1pPr>
             <a:lvl2pPr>
-              <a:defRPr sz="2800"/>
+              <a:defRPr sz="1493"/>
             </a:lvl2pPr>
             <a:lvl3pPr>
-              <a:defRPr sz="2400"/>
+              <a:defRPr sz="1280"/>
             </a:lvl3pPr>
             <a:lvl4pPr>
-              <a:defRPr sz="2000"/>
+              <a:defRPr sz="1067"/>
             </a:lvl4pPr>
             <a:lvl5pPr>
-              <a:defRPr sz="2000"/>
+              <a:defRPr sz="1067"/>
             </a:lvl5pPr>
             <a:lvl6pPr>
-              <a:defRPr sz="2000"/>
+              <a:defRPr sz="1067"/>
             </a:lvl6pPr>
             <a:lvl7pPr>
-              <a:defRPr sz="2000"/>
+              <a:defRPr sz="1067"/>
             </a:lvl7pPr>
             <a:lvl8pPr>
-              <a:defRPr sz="2000"/>
+              <a:defRPr sz="1067"/>
             </a:lvl8pPr>
             <a:lvl9pPr>
-              <a:defRPr sz="2000"/>
+              <a:defRPr sz="1067"/>
             </a:lvl9pPr>
           </a:lstStyle>
           <a:p>
@@ -2283,18 +2012,13 @@
               <a:rPr lang="en-US"/>
               <a:t>Fifth level</a:t>
             </a:r>
-          </a:p>
-        </p:txBody>
-      </p:sp>
-      <p:sp>
-        <p:nvSpPr>
-          <p:cNvPr id="4" name="Text Placeholder 3">
-            <a:extLst>
-              <a:ext uri="{FF2B5EF4-FFF2-40B4-BE49-F238E27FC236}">
-                <a16:creationId xmlns:a16="http://schemas.microsoft.com/office/drawing/2014/main" id="{CFB95DA8-5D24-F355-EFC5-69C2FC91AA82}"/>
-              </a:ext>
-            </a:extLst>
-          </p:cNvPr>
+            <a:endParaRPr lang="en-US" dirty="0"/>
+          </a:p>
+        </p:txBody>
+      </p:sp>
+      <p:sp>
+        <p:nvSpPr>
+          <p:cNvPr id="4" name="Text Placeholder 3"/>
           <p:cNvSpPr>
             <a:spLocks noGrp="1"/>
           </p:cNvSpPr>
@@ -2304,8 +2028,8 @@
         </p:nvSpPr>
         <p:spPr>
           <a:xfrm>
-            <a:off x="839788" y="2057400"/>
-            <a:ext cx="3932237" cy="3811588"/>
+            <a:off x="755810" y="1097280"/>
+            <a:ext cx="3539013" cy="2032847"/>
           </a:xfrm>
         </p:spPr>
         <p:txBody>
@@ -2313,39 +2037,39 @@
           <a:lstStyle>
             <a:lvl1pPr marL="0" indent="0">
               <a:buNone/>
-              <a:defRPr sz="1600"/>
+              <a:defRPr sz="853"/>
             </a:lvl1pPr>
-            <a:lvl2pPr marL="457200" indent="0">
-              <a:buNone/>
-              <a:defRPr sz="1400"/>
+            <a:lvl2pPr marL="243825" indent="0">
+              <a:buNone/>
+              <a:defRPr sz="747"/>
             </a:lvl2pPr>
-            <a:lvl3pPr marL="914400" indent="0">
-              <a:buNone/>
-              <a:defRPr sz="1200"/>
+            <a:lvl3pPr marL="487650" indent="0">
+              <a:buNone/>
+              <a:defRPr sz="640"/>
             </a:lvl3pPr>
-            <a:lvl4pPr marL="1371600" indent="0">
-              <a:buNone/>
-              <a:defRPr sz="1000"/>
+            <a:lvl4pPr marL="731474" indent="0">
+              <a:buNone/>
+              <a:defRPr sz="533"/>
             </a:lvl4pPr>
-            <a:lvl5pPr marL="1828800" indent="0">
-              <a:buNone/>
-              <a:defRPr sz="1000"/>
+            <a:lvl5pPr marL="975299" indent="0">
+              <a:buNone/>
+              <a:defRPr sz="533"/>
             </a:lvl5pPr>
-            <a:lvl6pPr marL="2286000" indent="0">
-              <a:buNone/>
-              <a:defRPr sz="1000"/>
+            <a:lvl6pPr marL="1219124" indent="0">
+              <a:buNone/>
+              <a:defRPr sz="533"/>
             </a:lvl6pPr>
-            <a:lvl7pPr marL="2743200" indent="0">
-              <a:buNone/>
-              <a:defRPr sz="1000"/>
+            <a:lvl7pPr marL="1462949" indent="0">
+              <a:buNone/>
+              <a:defRPr sz="533"/>
             </a:lvl7pPr>
-            <a:lvl8pPr marL="3200400" indent="0">
-              <a:buNone/>
-              <a:defRPr sz="1000"/>
+            <a:lvl8pPr marL="1706773" indent="0">
+              <a:buNone/>
+              <a:defRPr sz="533"/>
             </a:lvl8pPr>
-            <a:lvl9pPr marL="3657600" indent="0">
-              <a:buNone/>
-              <a:defRPr sz="1000"/>
+            <a:lvl9pPr marL="1950598" indent="0">
+              <a:buNone/>
+              <a:defRPr sz="533"/>
             </a:lvl9pPr>
           </a:lstStyle>
           <a:p>
@@ -2359,13 +2083,7 @@
       </p:sp>
       <p:sp>
         <p:nvSpPr>
-          <p:cNvPr id="5" name="Date Placeholder 4">
-            <a:extLst>
-              <a:ext uri="{FF2B5EF4-FFF2-40B4-BE49-F238E27FC236}">
-                <a16:creationId xmlns:a16="http://schemas.microsoft.com/office/drawing/2014/main" id="{809FC439-EAB9-2D46-4A7D-5E5C40249C0E}"/>
-              </a:ext>
-            </a:extLst>
-          </p:cNvPr>
+          <p:cNvPr id="5" name="Date Placeholder 4"/>
           <p:cNvSpPr>
             <a:spLocks noGrp="1"/>
           </p:cNvSpPr>
@@ -2380,7 +2098,7 @@
           <a:p>
             <a:fld id="{BE7A8A13-8D72-A04A-B2C1-C42F42AA96D9}" type="datetimeFigureOut">
               <a:rPr lang="en-US" smtClean="0"/>
-              <a:t>9/7/26</a:t>
+              <a:t>9/17/26</a:t>
             </a:fld>
             <a:endParaRPr lang="en-US"/>
           </a:p>
@@ -2388,13 +2106,7 @@
       </p:sp>
       <p:sp>
         <p:nvSpPr>
-          <p:cNvPr id="6" name="Footer Placeholder 5">
-            <a:extLst>
-              <a:ext uri="{FF2B5EF4-FFF2-40B4-BE49-F238E27FC236}">
-                <a16:creationId xmlns:a16="http://schemas.microsoft.com/office/drawing/2014/main" id="{9476D0A9-737A-AF01-2982-1CAC69E087B3}"/>
-              </a:ext>
-            </a:extLst>
-          </p:cNvPr>
+          <p:cNvPr id="6" name="Footer Placeholder 5"/>
           <p:cNvSpPr>
             <a:spLocks noGrp="1"/>
           </p:cNvSpPr>
@@ -2413,13 +2125,7 @@
       </p:sp>
       <p:sp>
         <p:nvSpPr>
-          <p:cNvPr id="7" name="Slide Number Placeholder 6">
-            <a:extLst>
-              <a:ext uri="{FF2B5EF4-FFF2-40B4-BE49-F238E27FC236}">
-                <a16:creationId xmlns:a16="http://schemas.microsoft.com/office/drawing/2014/main" id="{957F43D9-DEFB-61AF-8860-776D212DC3BF}"/>
-              </a:ext>
-            </a:extLst>
-          </p:cNvPr>
+          <p:cNvPr id="7" name="Slide Number Placeholder 6"/>
           <p:cNvSpPr>
             <a:spLocks noGrp="1"/>
           </p:cNvSpPr>
@@ -2443,7 +2149,7 @@
     </p:spTree>
     <p:extLst>
       <p:ext uri="{BB962C8B-B14F-4D97-AF65-F5344CB8AC3E}">
-        <p14:creationId xmlns:p14="http://schemas.microsoft.com/office/powerpoint/2010/main" val="2024285482"/>
+        <p14:creationId xmlns:p14="http://schemas.microsoft.com/office/powerpoint/2010/main" val="155581095"/>
       </p:ext>
     </p:extLst>
   </p:cSld>
@@ -2472,13 +2178,7 @@
       </p:grpSpPr>
       <p:sp>
         <p:nvSpPr>
-          <p:cNvPr id="2" name="Title 1">
-            <a:extLst>
-              <a:ext uri="{FF2B5EF4-FFF2-40B4-BE49-F238E27FC236}">
-                <a16:creationId xmlns:a16="http://schemas.microsoft.com/office/drawing/2014/main" id="{C4027D33-B091-DA57-8586-5635D032A6F5}"/>
-              </a:ext>
-            </a:extLst>
-          </p:cNvPr>
+          <p:cNvPr id="2" name="Title 1"/>
           <p:cNvSpPr>
             <a:spLocks noGrp="1"/>
           </p:cNvSpPr>
@@ -2488,15 +2188,15 @@
         </p:nvSpPr>
         <p:spPr>
           <a:xfrm>
-            <a:off x="839788" y="457200"/>
-            <a:ext cx="3932237" cy="1600200"/>
+            <a:off x="755810" y="243840"/>
+            <a:ext cx="3539013" cy="853440"/>
           </a:xfrm>
         </p:spPr>
         <p:txBody>
           <a:bodyPr anchor="b"/>
           <a:lstStyle>
             <a:lvl1pPr>
-              <a:defRPr sz="3200"/>
+              <a:defRPr sz="1707"/>
             </a:lvl1pPr>
           </a:lstStyle>
           <a:p>
@@ -2504,20 +2204,15 @@
               <a:rPr lang="en-US"/>
               <a:t>Click to edit Master title style</a:t>
             </a:r>
-          </a:p>
-        </p:txBody>
-      </p:sp>
-      <p:sp>
-        <p:nvSpPr>
-          <p:cNvPr id="3" name="Picture Placeholder 2">
-            <a:extLst>
-              <a:ext uri="{FF2B5EF4-FFF2-40B4-BE49-F238E27FC236}">
-                <a16:creationId xmlns:a16="http://schemas.microsoft.com/office/drawing/2014/main" id="{3D10A7E9-B87E-B2CB-7203-884D58A982F3}"/>
-              </a:ext>
-            </a:extLst>
-          </p:cNvPr>
-          <p:cNvSpPr>
-            <a:spLocks noGrp="1"/>
+            <a:endParaRPr lang="en-US" dirty="0"/>
+          </a:p>
+        </p:txBody>
+      </p:sp>
+      <p:sp>
+        <p:nvSpPr>
+          <p:cNvPr id="3" name="Picture Placeholder 2"/>
+          <p:cNvSpPr>
+            <a:spLocks noGrp="1" noChangeAspect="1"/>
           </p:cNvSpPr>
           <p:nvPr>
             <p:ph type="pic" idx="1"/>
@@ -2525,64 +2220,62 @@
         </p:nvSpPr>
         <p:spPr>
           <a:xfrm>
-            <a:off x="5183188" y="987425"/>
-            <a:ext cx="6172200" cy="4873625"/>
+            <a:off x="4664869" y="526627"/>
+            <a:ext cx="5554980" cy="2599267"/>
           </a:xfrm>
         </p:spPr>
         <p:txBody>
-          <a:bodyPr/>
+          <a:bodyPr anchor="t"/>
           <a:lstStyle>
             <a:lvl1pPr marL="0" indent="0">
               <a:buNone/>
-              <a:defRPr sz="3200"/>
+              <a:defRPr sz="1707"/>
             </a:lvl1pPr>
-            <a:lvl2pPr marL="457200" indent="0">
-              <a:buNone/>
-              <a:defRPr sz="2800"/>
+            <a:lvl2pPr marL="243825" indent="0">
+              <a:buNone/>
+              <a:defRPr sz="1493"/>
             </a:lvl2pPr>
-            <a:lvl3pPr marL="914400" indent="0">
-              <a:buNone/>
-              <a:defRPr sz="2400"/>
+            <a:lvl3pPr marL="487650" indent="0">
+              <a:buNone/>
+              <a:defRPr sz="1280"/>
             </a:lvl3pPr>
-            <a:lvl4pPr marL="1371600" indent="0">
-              <a:buNone/>
-              <a:defRPr sz="2000"/>
+            <a:lvl4pPr marL="731474" indent="0">
+              <a:buNone/>
+              <a:defRPr sz="1067"/>
             </a:lvl4pPr>
-            <a:lvl5pPr marL="1828800" indent="0">
-              <a:buNone/>
-              <a:defRPr sz="2000"/>
+            <a:lvl5pPr marL="975299" indent="0">
+              <a:buNone/>
+              <a:defRPr sz="1067"/>
             </a:lvl5pPr>
-            <a:lvl6pPr marL="2286000" indent="0">
-              <a:buNone/>
-              <a:defRPr sz="2000"/>
+            <a:lvl6pPr marL="1219124" indent="0">
+              <a:buNone/>
+              <a:defRPr sz="1067"/>
             </a:lvl6pPr>
-            <a:lvl7pPr marL="2743200" indent="0">
-              <a:buNone/>
-              <a:defRPr sz="2000"/>
+            <a:lvl7pPr marL="1462949" indent="0">
+              <a:buNone/>
+              <a:defRPr sz="1067"/>
             </a:lvl7pPr>
-            <a:lvl8pPr marL="3200400" indent="0">
-              <a:buNone/>
-              <a:defRPr sz="2000"/>
+            <a:lvl8pPr marL="1706773" indent="0">
+              <a:buNone/>
+              <a:defRPr sz="1067"/>
             </a:lvl8pPr>
-            <a:lvl9pPr marL="3657600" indent="0">
-              <a:buNone/>
-              <a:defRPr sz="2000"/>
+            <a:lvl9pPr marL="1950598" indent="0">
+              <a:buNone/>
+              <a:defRPr sz="1067"/>
             </a:lvl9pPr>
           </a:lstStyle>
           <a:p>
-            <a:endParaRPr lang="en-US"/>
-          </a:p>
-        </p:txBody>
-      </p:sp>
-      <p:sp>
-        <p:nvSpPr>
-          <p:cNvPr id="4" name="Text Placeholder 3">
-            <a:extLst>
-              <a:ext uri="{FF2B5EF4-FFF2-40B4-BE49-F238E27FC236}">
-                <a16:creationId xmlns:a16="http://schemas.microsoft.com/office/drawing/2014/main" id="{9BC48D61-14B6-0332-073C-B929B0A3BFED}"/>
-              </a:ext>
-            </a:extLst>
-          </p:cNvPr>
+            <a:r>
+              <a:rPr lang="en-US"/>
+              <a:t>Click icon to add picture</a:t>
+            </a:r>
+            <a:endParaRPr lang="en-US" dirty="0"/>
+          </a:p>
+        </p:txBody>
+      </p:sp>
+      <p:sp>
+        <p:nvSpPr>
+          <p:cNvPr id="4" name="Text Placeholder 3"/>
           <p:cNvSpPr>
             <a:spLocks noGrp="1"/>
           </p:cNvSpPr>
@@ -2592,8 +2285,8 @@
         </p:nvSpPr>
         <p:spPr>
           <a:xfrm>
-            <a:off x="839788" y="2057400"/>
-            <a:ext cx="3932237" cy="3811588"/>
+            <a:off x="755810" y="1097280"/>
+            <a:ext cx="3539013" cy="2032847"/>
           </a:xfrm>
         </p:spPr>
         <p:txBody>
@@ -2601,39 +2294,39 @@
           <a:lstStyle>
             <a:lvl1pPr marL="0" indent="0">
               <a:buNone/>
-              <a:defRPr sz="1600"/>
+              <a:defRPr sz="853"/>
             </a:lvl1pPr>
-            <a:lvl2pPr marL="457200" indent="0">
-              <a:buNone/>
-              <a:defRPr sz="1400"/>
+            <a:lvl2pPr marL="243825" indent="0">
+              <a:buNone/>
+              <a:defRPr sz="747"/>
             </a:lvl2pPr>
-            <a:lvl3pPr marL="914400" indent="0">
-              <a:buNone/>
-              <a:defRPr sz="1200"/>
+            <a:lvl3pPr marL="487650" indent="0">
+              <a:buNone/>
+              <a:defRPr sz="640"/>
             </a:lvl3pPr>
-            <a:lvl4pPr marL="1371600" indent="0">
-              <a:buNone/>
-              <a:defRPr sz="1000"/>
+            <a:lvl4pPr marL="731474" indent="0">
+              <a:buNone/>
+              <a:defRPr sz="533"/>
             </a:lvl4pPr>
-            <a:lvl5pPr marL="1828800" indent="0">
-              <a:buNone/>
-              <a:defRPr sz="1000"/>
+            <a:lvl5pPr marL="975299" indent="0">
+              <a:buNone/>
+              <a:defRPr sz="533"/>
             </a:lvl5pPr>
-            <a:lvl6pPr marL="2286000" indent="0">
-              <a:buNone/>
-              <a:defRPr sz="1000"/>
+            <a:lvl6pPr marL="1219124" indent="0">
+              <a:buNone/>
+              <a:defRPr sz="533"/>
             </a:lvl6pPr>
-            <a:lvl7pPr marL="2743200" indent="0">
-              <a:buNone/>
-              <a:defRPr sz="1000"/>
+            <a:lvl7pPr marL="1462949" indent="0">
+              <a:buNone/>
+              <a:defRPr sz="533"/>
             </a:lvl7pPr>
-            <a:lvl8pPr marL="3200400" indent="0">
-              <a:buNone/>
-              <a:defRPr sz="1000"/>
+            <a:lvl8pPr marL="1706773" indent="0">
+              <a:buNone/>
+              <a:defRPr sz="533"/>
             </a:lvl8pPr>
-            <a:lvl9pPr marL="3657600" indent="0">
-              <a:buNone/>
-              <a:defRPr sz="1000"/>
+            <a:lvl9pPr marL="1950598" indent="0">
+              <a:buNone/>
+              <a:defRPr sz="533"/>
             </a:lvl9pPr>
           </a:lstStyle>
           <a:p>
@@ -2647,13 +2340,7 @@
       </p:sp>
       <p:sp>
         <p:nvSpPr>
-          <p:cNvPr id="5" name="Date Placeholder 4">
-            <a:extLst>
-              <a:ext uri="{FF2B5EF4-FFF2-40B4-BE49-F238E27FC236}">
-                <a16:creationId xmlns:a16="http://schemas.microsoft.com/office/drawing/2014/main" id="{0C49310A-299D-C1D2-37B4-543D7D8CDBF1}"/>
-              </a:ext>
-            </a:extLst>
-          </p:cNvPr>
+          <p:cNvPr id="5" name="Date Placeholder 4"/>
           <p:cNvSpPr>
             <a:spLocks noGrp="1"/>
           </p:cNvSpPr>
@@ -2668,7 +2355,7 @@
           <a:p>
             <a:fld id="{BE7A8A13-8D72-A04A-B2C1-C42F42AA96D9}" type="datetimeFigureOut">
               <a:rPr lang="en-US" smtClean="0"/>
-              <a:t>9/7/26</a:t>
+              <a:t>9/17/26</a:t>
             </a:fld>
             <a:endParaRPr lang="en-US"/>
           </a:p>
@@ -2676,13 +2363,7 @@
       </p:sp>
       <p:sp>
         <p:nvSpPr>
-          <p:cNvPr id="6" name="Footer Placeholder 5">
-            <a:extLst>
-              <a:ext uri="{FF2B5EF4-FFF2-40B4-BE49-F238E27FC236}">
-                <a16:creationId xmlns:a16="http://schemas.microsoft.com/office/drawing/2014/main" id="{B65F75BA-77DC-ED16-E5F2-7360CA640822}"/>
-              </a:ext>
-            </a:extLst>
-          </p:cNvPr>
+          <p:cNvPr id="6" name="Footer Placeholder 5"/>
           <p:cNvSpPr>
             <a:spLocks noGrp="1"/>
           </p:cNvSpPr>
@@ -2701,13 +2382,7 @@
       </p:sp>
       <p:sp>
         <p:nvSpPr>
-          <p:cNvPr id="7" name="Slide Number Placeholder 6">
-            <a:extLst>
-              <a:ext uri="{FF2B5EF4-FFF2-40B4-BE49-F238E27FC236}">
-                <a16:creationId xmlns:a16="http://schemas.microsoft.com/office/drawing/2014/main" id="{CA020FB2-5CB3-F980-9ABD-4F0D90C84094}"/>
-              </a:ext>
-            </a:extLst>
-          </p:cNvPr>
+          <p:cNvPr id="7" name="Slide Number Placeholder 6"/>
           <p:cNvSpPr>
             <a:spLocks noGrp="1"/>
           </p:cNvSpPr>
@@ -2731,7 +2406,7 @@
     </p:spTree>
     <p:extLst>
       <p:ext uri="{BB962C8B-B14F-4D97-AF65-F5344CB8AC3E}">
-        <p14:creationId xmlns:p14="http://schemas.microsoft.com/office/powerpoint/2010/main" val="938844340"/>
+        <p14:creationId xmlns:p14="http://schemas.microsoft.com/office/powerpoint/2010/main" val="2960651544"/>
       </p:ext>
     </p:extLst>
   </p:cSld>
@@ -2765,13 +2440,7 @@
       </p:grpSpPr>
       <p:sp>
         <p:nvSpPr>
-          <p:cNvPr id="2" name="Title Placeholder 1">
-            <a:extLst>
-              <a:ext uri="{FF2B5EF4-FFF2-40B4-BE49-F238E27FC236}">
-                <a16:creationId xmlns:a16="http://schemas.microsoft.com/office/drawing/2014/main" id="{3F177B57-3C66-37BC-6B66-338F2D554649}"/>
-              </a:ext>
-            </a:extLst>
-          </p:cNvPr>
+          <p:cNvPr id="2" name="Title Placeholder 1"/>
           <p:cNvSpPr>
             <a:spLocks noGrp="1"/>
           </p:cNvSpPr>
@@ -2781,8 +2450,8 @@
         </p:nvSpPr>
         <p:spPr>
           <a:xfrm>
-            <a:off x="838200" y="365125"/>
-            <a:ext cx="10515600" cy="1325563"/>
+            <a:off x="754380" y="194734"/>
+            <a:ext cx="9464040" cy="706967"/>
           </a:xfrm>
           <a:prstGeom prst="rect">
             <a:avLst/>
@@ -2798,18 +2467,13 @@
               <a:rPr lang="en-US"/>
               <a:t>Click to edit Master title style</a:t>
             </a:r>
-          </a:p>
-        </p:txBody>
-      </p:sp>
-      <p:sp>
-        <p:nvSpPr>
-          <p:cNvPr id="3" name="Text Placeholder 2">
-            <a:extLst>
-              <a:ext uri="{FF2B5EF4-FFF2-40B4-BE49-F238E27FC236}">
-                <a16:creationId xmlns:a16="http://schemas.microsoft.com/office/drawing/2014/main" id="{A4ED8A0D-5633-87DE-8359-CFE1345DAA75}"/>
-              </a:ext>
-            </a:extLst>
-          </p:cNvPr>
+            <a:endParaRPr lang="en-US" dirty="0"/>
+          </a:p>
+        </p:txBody>
+      </p:sp>
+      <p:sp>
+        <p:nvSpPr>
+          <p:cNvPr id="3" name="Text Placeholder 2"/>
           <p:cNvSpPr>
             <a:spLocks noGrp="1"/>
           </p:cNvSpPr>
@@ -2819,8 +2483,8 @@
         </p:nvSpPr>
         <p:spPr>
           <a:xfrm>
-            <a:off x="838200" y="1825625"/>
-            <a:ext cx="10515600" cy="4351338"/>
+            <a:off x="754380" y="973666"/>
+            <a:ext cx="9464040" cy="2320714"/>
           </a:xfrm>
           <a:prstGeom prst="rect">
             <a:avLst/>
@@ -2865,18 +2529,13 @@
               <a:rPr lang="en-US"/>
               <a:t>Fifth level</a:t>
             </a:r>
-          </a:p>
-        </p:txBody>
-      </p:sp>
-      <p:sp>
-        <p:nvSpPr>
-          <p:cNvPr id="4" name="Date Placeholder 3">
-            <a:extLst>
-              <a:ext uri="{FF2B5EF4-FFF2-40B4-BE49-F238E27FC236}">
-                <a16:creationId xmlns:a16="http://schemas.microsoft.com/office/drawing/2014/main" id="{F0D22261-F1A3-5349-6692-73F2059CAC83}"/>
-              </a:ext>
-            </a:extLst>
-          </p:cNvPr>
+            <a:endParaRPr lang="en-US" dirty="0"/>
+          </a:p>
+        </p:txBody>
+      </p:sp>
+      <p:sp>
+        <p:nvSpPr>
+          <p:cNvPr id="4" name="Date Placeholder 3"/>
           <p:cNvSpPr>
             <a:spLocks noGrp="1"/>
           </p:cNvSpPr>
@@ -2886,8 +2545,8 @@
         </p:nvSpPr>
         <p:spPr>
           <a:xfrm>
-            <a:off x="838200" y="6356350"/>
-            <a:ext cx="2743200" cy="365125"/>
+            <a:off x="754380" y="3390054"/>
+            <a:ext cx="2468880" cy="194733"/>
           </a:xfrm>
           <a:prstGeom prst="rect">
             <a:avLst/>
@@ -2897,7 +2556,7 @@
           <a:bodyPr vert="horz" lIns="91440" tIns="45720" rIns="91440" bIns="45720" rtlCol="0" anchor="ctr"/>
           <a:lstStyle>
             <a:lvl1pPr algn="l">
-              <a:defRPr sz="1200">
+              <a:defRPr sz="640">
                 <a:solidFill>
                   <a:schemeClr val="tx1">
                     <a:tint val="75000"/>
@@ -2909,7 +2568,7 @@
           <a:p>
             <a:fld id="{BE7A8A13-8D72-A04A-B2C1-C42F42AA96D9}" type="datetimeFigureOut">
               <a:rPr lang="en-US" smtClean="0"/>
-              <a:t>9/7/26</a:t>
+              <a:t>9/17/26</a:t>
             </a:fld>
             <a:endParaRPr lang="en-US"/>
           </a:p>
@@ -2917,13 +2576,7 @@
       </p:sp>
       <p:sp>
         <p:nvSpPr>
-          <p:cNvPr id="5" name="Footer Placeholder 4">
-            <a:extLst>
-              <a:ext uri="{FF2B5EF4-FFF2-40B4-BE49-F238E27FC236}">
-                <a16:creationId xmlns:a16="http://schemas.microsoft.com/office/drawing/2014/main" id="{CF7EF786-8461-B7F5-0BE7-685FB254033C}"/>
-              </a:ext>
-            </a:extLst>
-          </p:cNvPr>
+          <p:cNvPr id="5" name="Footer Placeholder 4"/>
           <p:cNvSpPr>
             <a:spLocks noGrp="1"/>
           </p:cNvSpPr>
@@ -2933,8 +2586,8 @@
         </p:nvSpPr>
         <p:spPr>
           <a:xfrm>
-            <a:off x="4038600" y="6356350"/>
-            <a:ext cx="4114800" cy="365125"/>
+            <a:off x="3634740" y="3390054"/>
+            <a:ext cx="3703320" cy="194733"/>
           </a:xfrm>
           <a:prstGeom prst="rect">
             <a:avLst/>
@@ -2944,7 +2597,7 @@
           <a:bodyPr vert="horz" lIns="91440" tIns="45720" rIns="91440" bIns="45720" rtlCol="0" anchor="ctr"/>
           <a:lstStyle>
             <a:lvl1pPr algn="ctr">
-              <a:defRPr sz="1200">
+              <a:defRPr sz="640">
                 <a:solidFill>
                   <a:schemeClr val="tx1">
                     <a:tint val="75000"/>
@@ -2960,13 +2613,7 @@
       </p:sp>
       <p:sp>
         <p:nvSpPr>
-          <p:cNvPr id="6" name="Slide Number Placeholder 5">
-            <a:extLst>
-              <a:ext uri="{FF2B5EF4-FFF2-40B4-BE49-F238E27FC236}">
-                <a16:creationId xmlns:a16="http://schemas.microsoft.com/office/drawing/2014/main" id="{FDF32CFB-867A-527D-E669-965D86012F04}"/>
-              </a:ext>
-            </a:extLst>
-          </p:cNvPr>
+          <p:cNvPr id="6" name="Slide Number Placeholder 5"/>
           <p:cNvSpPr>
             <a:spLocks noGrp="1"/>
           </p:cNvSpPr>
@@ -2976,8 +2623,8 @@
         </p:nvSpPr>
         <p:spPr>
           <a:xfrm>
-            <a:off x="8610600" y="6356350"/>
-            <a:ext cx="2743200" cy="365125"/>
+            <a:off x="7749540" y="3390054"/>
+            <a:ext cx="2468880" cy="194733"/>
           </a:xfrm>
           <a:prstGeom prst="rect">
             <a:avLst/>
@@ -2987,7 +2634,7 @@
           <a:bodyPr vert="horz" lIns="91440" tIns="45720" rIns="91440" bIns="45720" rtlCol="0" anchor="ctr"/>
           <a:lstStyle>
             <a:lvl1pPr algn="r">
-              <a:defRPr sz="1200">
+              <a:defRPr sz="640">
                 <a:solidFill>
                   <a:schemeClr val="tx1">
                     <a:tint val="75000"/>
@@ -3008,27 +2655,27 @@
     </p:spTree>
     <p:extLst>
       <p:ext uri="{BB962C8B-B14F-4D97-AF65-F5344CB8AC3E}">
-        <p14:creationId xmlns:p14="http://schemas.microsoft.com/office/powerpoint/2010/main" val="3016444154"/>
+        <p14:creationId xmlns:p14="http://schemas.microsoft.com/office/powerpoint/2010/main" val="2964410083"/>
       </p:ext>
     </p:extLst>
   </p:cSld>
   <p:clrMap bg1="lt1" tx1="dk1" bg2="lt2" tx2="dk2" accent1="accent1" accent2="accent2" accent3="accent3" accent4="accent4" accent5="accent5" accent6="accent6" hlink="hlink" folHlink="folHlink"/>
   <p:sldLayoutIdLst>
-    <p:sldLayoutId id="2147483649" r:id="rId1"/>
-    <p:sldLayoutId id="2147483650" r:id="rId2"/>
-    <p:sldLayoutId id="2147483651" r:id="rId3"/>
-    <p:sldLayoutId id="2147483652" r:id="rId4"/>
-    <p:sldLayoutId id="2147483653" r:id="rId5"/>
-    <p:sldLayoutId id="2147483654" r:id="rId6"/>
-    <p:sldLayoutId id="2147483655" r:id="rId7"/>
-    <p:sldLayoutId id="2147483656" r:id="rId8"/>
-    <p:sldLayoutId id="2147483657" r:id="rId9"/>
-    <p:sldLayoutId id="2147483658" r:id="rId10"/>
-    <p:sldLayoutId id="2147483659" r:id="rId11"/>
+    <p:sldLayoutId id="2147483661" r:id="rId1"/>
+    <p:sldLayoutId id="2147483662" r:id="rId2"/>
+    <p:sldLayoutId id="2147483663" r:id="rId3"/>
+    <p:sldLayoutId id="2147483664" r:id="rId4"/>
+    <p:sldLayoutId id="2147483665" r:id="rId5"/>
+    <p:sldLayoutId id="2147483666" r:id="rId6"/>
+    <p:sldLayoutId id="2147483667" r:id="rId7"/>
+    <p:sldLayoutId id="2147483668" r:id="rId8"/>
+    <p:sldLayoutId id="2147483669" r:id="rId9"/>
+    <p:sldLayoutId id="2147483670" r:id="rId10"/>
+    <p:sldLayoutId id="2147483671" r:id="rId11"/>
   </p:sldLayoutIdLst>
   <p:txStyles>
     <p:titleStyle>
-      <a:lvl1pPr algn="l" defTabSz="914400" rtl="0" eaLnBrk="1" latinLnBrk="0" hangingPunct="1">
+      <a:lvl1pPr algn="l" defTabSz="487650" rtl="0" eaLnBrk="1" latinLnBrk="0" hangingPunct="1">
         <a:lnSpc>
           <a:spcPct val="90000"/>
         </a:lnSpc>
@@ -3036,7 +2683,7 @@
           <a:spcPct val="0"/>
         </a:spcBef>
         <a:buNone/>
-        <a:defRPr sz="4400" kern="1200">
+        <a:defRPr sz="2347" kern="1200">
           <a:solidFill>
             <a:schemeClr val="tx1"/>
           </a:solidFill>
@@ -3047,16 +2694,16 @@
       </a:lvl1pPr>
     </p:titleStyle>
     <p:bodyStyle>
-      <a:lvl1pPr marL="228600" indent="-228600" algn="l" defTabSz="914400" rtl="0" eaLnBrk="1" latinLnBrk="0" hangingPunct="1">
+      <a:lvl1pPr marL="121912" indent="-121912" algn="l" defTabSz="487650" rtl="0" eaLnBrk="1" latinLnBrk="0" hangingPunct="1">
         <a:lnSpc>
           <a:spcPct val="90000"/>
         </a:lnSpc>
         <a:spcBef>
-          <a:spcPts val="1000"/>
+          <a:spcPts val="533"/>
         </a:spcBef>
         <a:buFont typeface="Arial" panose="020B0604020202020204" pitchFamily="34" charset="0"/>
         <a:buChar char="•"/>
-        <a:defRPr sz="2800" kern="1200">
+        <a:defRPr sz="1493" kern="1200">
           <a:solidFill>
             <a:schemeClr val="tx1"/>
           </a:solidFill>
@@ -3065,16 +2712,16 @@
           <a:cs typeface="+mn-cs"/>
         </a:defRPr>
       </a:lvl1pPr>
-      <a:lvl2pPr marL="685800" indent="-228600" algn="l" defTabSz="914400" rtl="0" eaLnBrk="1" latinLnBrk="0" hangingPunct="1">
+      <a:lvl2pPr marL="365737" indent="-121912" algn="l" defTabSz="487650" rtl="0" eaLnBrk="1" latinLnBrk="0" hangingPunct="1">
         <a:lnSpc>
           <a:spcPct val="90000"/>
         </a:lnSpc>
         <a:spcBef>
-          <a:spcPts val="500"/>
+          <a:spcPts val="267"/>
         </a:spcBef>
         <a:buFont typeface="Arial" panose="020B0604020202020204" pitchFamily="34" charset="0"/>
         <a:buChar char="•"/>
-        <a:defRPr sz="2400" kern="1200">
+        <a:defRPr sz="1280" kern="1200">
           <a:solidFill>
             <a:schemeClr val="tx1"/>
           </a:solidFill>
@@ -3083,16 +2730,16 @@
           <a:cs typeface="+mn-cs"/>
         </a:defRPr>
       </a:lvl2pPr>
-      <a:lvl3pPr marL="1143000" indent="-228600" algn="l" defTabSz="914400" rtl="0" eaLnBrk="1" latinLnBrk="0" hangingPunct="1">
+      <a:lvl3pPr marL="609562" indent="-121912" algn="l" defTabSz="487650" rtl="0" eaLnBrk="1" latinLnBrk="0" hangingPunct="1">
         <a:lnSpc>
           <a:spcPct val="90000"/>
         </a:lnSpc>
         <a:spcBef>
-          <a:spcPts val="500"/>
+          <a:spcPts val="267"/>
         </a:spcBef>
         <a:buFont typeface="Arial" panose="020B0604020202020204" pitchFamily="34" charset="0"/>
         <a:buChar char="•"/>
-        <a:defRPr sz="2000" kern="1200">
+        <a:defRPr sz="1067" kern="1200">
           <a:solidFill>
             <a:schemeClr val="tx1"/>
           </a:solidFill>
@@ -3101,16 +2748,16 @@
           <a:cs typeface="+mn-cs"/>
         </a:defRPr>
       </a:lvl3pPr>
-      <a:lvl4pPr marL="1600200" indent="-228600" algn="l" defTabSz="914400" rtl="0" eaLnBrk="1" latinLnBrk="0" hangingPunct="1">
+      <a:lvl4pPr marL="853387" indent="-121912" algn="l" defTabSz="487650" rtl="0" eaLnBrk="1" latinLnBrk="0" hangingPunct="1">
         <a:lnSpc>
           <a:spcPct val="90000"/>
         </a:lnSpc>
         <a:spcBef>
-          <a:spcPts val="500"/>
+          <a:spcPts val="267"/>
         </a:spcBef>
         <a:buFont typeface="Arial" panose="020B0604020202020204" pitchFamily="34" charset="0"/>
         <a:buChar char="•"/>
-        <a:defRPr sz="1800" kern="1200">
+        <a:defRPr sz="960" kern="1200">
           <a:solidFill>
             <a:schemeClr val="tx1"/>
           </a:solidFill>
@@ -3119,16 +2766,16 @@
           <a:cs typeface="+mn-cs"/>
         </a:defRPr>
       </a:lvl4pPr>
-      <a:lvl5pPr marL="2057400" indent="-228600" algn="l" defTabSz="914400" rtl="0" eaLnBrk="1" latinLnBrk="0" hangingPunct="1">
+      <a:lvl5pPr marL="1097211" indent="-121912" algn="l" defTabSz="487650" rtl="0" eaLnBrk="1" latinLnBrk="0" hangingPunct="1">
         <a:lnSpc>
           <a:spcPct val="90000"/>
         </a:lnSpc>
         <a:spcBef>
-          <a:spcPts val="500"/>
+          <a:spcPts val="267"/>
         </a:spcBef>
         <a:buFont typeface="Arial" panose="020B0604020202020204" pitchFamily="34" charset="0"/>
         <a:buChar char="•"/>
-        <a:defRPr sz="1800" kern="1200">
+        <a:defRPr sz="960" kern="1200">
           <a:solidFill>
             <a:schemeClr val="tx1"/>
           </a:solidFill>
@@ -3137,16 +2784,16 @@
           <a:cs typeface="+mn-cs"/>
         </a:defRPr>
       </a:lvl5pPr>
-      <a:lvl6pPr marL="2514600" indent="-228600" algn="l" defTabSz="914400" rtl="0" eaLnBrk="1" latinLnBrk="0" hangingPunct="1">
+      <a:lvl6pPr marL="1341036" indent="-121912" algn="l" defTabSz="487650" rtl="0" eaLnBrk="1" latinLnBrk="0" hangingPunct="1">
         <a:lnSpc>
           <a:spcPct val="90000"/>
         </a:lnSpc>
         <a:spcBef>
-          <a:spcPts val="500"/>
+          <a:spcPts val="267"/>
         </a:spcBef>
         <a:buFont typeface="Arial" panose="020B0604020202020204" pitchFamily="34" charset="0"/>
         <a:buChar char="•"/>
-        <a:defRPr sz="1800" kern="1200">
+        <a:defRPr sz="960" kern="1200">
           <a:solidFill>
             <a:schemeClr val="tx1"/>
           </a:solidFill>
@@ -3155,16 +2802,16 @@
           <a:cs typeface="+mn-cs"/>
         </a:defRPr>
       </a:lvl6pPr>
-      <a:lvl7pPr marL="2971800" indent="-228600" algn="l" defTabSz="914400" rtl="0" eaLnBrk="1" latinLnBrk="0" hangingPunct="1">
+      <a:lvl7pPr marL="1584861" indent="-121912" algn="l" defTabSz="487650" rtl="0" eaLnBrk="1" latinLnBrk="0" hangingPunct="1">
         <a:lnSpc>
           <a:spcPct val="90000"/>
         </a:lnSpc>
         <a:spcBef>
-          <a:spcPts val="500"/>
+          <a:spcPts val="267"/>
         </a:spcBef>
         <a:buFont typeface="Arial" panose="020B0604020202020204" pitchFamily="34" charset="0"/>
         <a:buChar char="•"/>
-        <a:defRPr sz="1800" kern="1200">
+        <a:defRPr sz="960" kern="1200">
           <a:solidFill>
             <a:schemeClr val="tx1"/>
           </a:solidFill>
@@ -3173,16 +2820,16 @@
           <a:cs typeface="+mn-cs"/>
         </a:defRPr>
       </a:lvl7pPr>
-      <a:lvl8pPr marL="3429000" indent="-228600" algn="l" defTabSz="914400" rtl="0" eaLnBrk="1" latinLnBrk="0" hangingPunct="1">
+      <a:lvl8pPr marL="1828686" indent="-121912" algn="l" defTabSz="487650" rtl="0" eaLnBrk="1" latinLnBrk="0" hangingPunct="1">
         <a:lnSpc>
           <a:spcPct val="90000"/>
         </a:lnSpc>
         <a:spcBef>
-          <a:spcPts val="500"/>
+          <a:spcPts val="267"/>
         </a:spcBef>
         <a:buFont typeface="Arial" panose="020B0604020202020204" pitchFamily="34" charset="0"/>
         <a:buChar char="•"/>
-        <a:defRPr sz="1800" kern="1200">
+        <a:defRPr sz="960" kern="1200">
           <a:solidFill>
             <a:schemeClr val="tx1"/>
           </a:solidFill>
@@ -3191,16 +2838,16 @@
           <a:cs typeface="+mn-cs"/>
         </a:defRPr>
       </a:lvl8pPr>
-      <a:lvl9pPr marL="3886200" indent="-228600" algn="l" defTabSz="914400" rtl="0" eaLnBrk="1" latinLnBrk="0" hangingPunct="1">
+      <a:lvl9pPr marL="2072510" indent="-121912" algn="l" defTabSz="487650" rtl="0" eaLnBrk="1" latinLnBrk="0" hangingPunct="1">
         <a:lnSpc>
           <a:spcPct val="90000"/>
         </a:lnSpc>
         <a:spcBef>
-          <a:spcPts val="500"/>
+          <a:spcPts val="267"/>
         </a:spcBef>
         <a:buFont typeface="Arial" panose="020B0604020202020204" pitchFamily="34" charset="0"/>
         <a:buChar char="•"/>
-        <a:defRPr sz="1800" kern="1200">
+        <a:defRPr sz="960" kern="1200">
           <a:solidFill>
             <a:schemeClr val="tx1"/>
           </a:solidFill>
@@ -3214,8 +2861,8 @@
       <a:defPPr>
         <a:defRPr lang="en-US"/>
       </a:defPPr>
-      <a:lvl1pPr marL="0" algn="l" defTabSz="914400" rtl="0" eaLnBrk="1" latinLnBrk="0" hangingPunct="1">
-        <a:defRPr sz="1800" kern="1200">
+      <a:lvl1pPr marL="0" algn="l" defTabSz="487650" rtl="0" eaLnBrk="1" latinLnBrk="0" hangingPunct="1">
+        <a:defRPr sz="960" kern="1200">
           <a:solidFill>
             <a:schemeClr val="tx1"/>
           </a:solidFill>
@@ -3224,8 +2871,8 @@
           <a:cs typeface="+mn-cs"/>
         </a:defRPr>
       </a:lvl1pPr>
-      <a:lvl2pPr marL="457200" algn="l" defTabSz="914400" rtl="0" eaLnBrk="1" latinLnBrk="0" hangingPunct="1">
-        <a:defRPr sz="1800" kern="1200">
+      <a:lvl2pPr marL="243825" algn="l" defTabSz="487650" rtl="0" eaLnBrk="1" latinLnBrk="0" hangingPunct="1">
+        <a:defRPr sz="960" kern="1200">
           <a:solidFill>
             <a:schemeClr val="tx1"/>
           </a:solidFill>
@@ -3234,8 +2881,8 @@
           <a:cs typeface="+mn-cs"/>
         </a:defRPr>
       </a:lvl2pPr>
-      <a:lvl3pPr marL="914400" algn="l" defTabSz="914400" rtl="0" eaLnBrk="1" latinLnBrk="0" hangingPunct="1">
-        <a:defRPr sz="1800" kern="1200">
+      <a:lvl3pPr marL="487650" algn="l" defTabSz="487650" rtl="0" eaLnBrk="1" latinLnBrk="0" hangingPunct="1">
+        <a:defRPr sz="960" kern="1200">
           <a:solidFill>
             <a:schemeClr val="tx1"/>
           </a:solidFill>
@@ -3244,8 +2891,8 @@
           <a:cs typeface="+mn-cs"/>
         </a:defRPr>
       </a:lvl3pPr>
-      <a:lvl4pPr marL="1371600" algn="l" defTabSz="914400" rtl="0" eaLnBrk="1" latinLnBrk="0" hangingPunct="1">
-        <a:defRPr sz="1800" kern="1200">
+      <a:lvl4pPr marL="731474" algn="l" defTabSz="487650" rtl="0" eaLnBrk="1" latinLnBrk="0" hangingPunct="1">
+        <a:defRPr sz="960" kern="1200">
           <a:solidFill>
             <a:schemeClr val="tx1"/>
           </a:solidFill>
@@ -3254,8 +2901,8 @@
           <a:cs typeface="+mn-cs"/>
         </a:defRPr>
       </a:lvl4pPr>
-      <a:lvl5pPr marL="1828800" algn="l" defTabSz="914400" rtl="0" eaLnBrk="1" latinLnBrk="0" hangingPunct="1">
-        <a:defRPr sz="1800" kern="1200">
+      <a:lvl5pPr marL="975299" algn="l" defTabSz="487650" rtl="0" eaLnBrk="1" latinLnBrk="0" hangingPunct="1">
+        <a:defRPr sz="960" kern="1200">
           <a:solidFill>
             <a:schemeClr val="tx1"/>
           </a:solidFill>
@@ -3264,8 +2911,8 @@
           <a:cs typeface="+mn-cs"/>
         </a:defRPr>
       </a:lvl5pPr>
-      <a:lvl6pPr marL="2286000" algn="l" defTabSz="914400" rtl="0" eaLnBrk="1" latinLnBrk="0" hangingPunct="1">
-        <a:defRPr sz="1800" kern="1200">
+      <a:lvl6pPr marL="1219124" algn="l" defTabSz="487650" rtl="0" eaLnBrk="1" latinLnBrk="0" hangingPunct="1">
+        <a:defRPr sz="960" kern="1200">
           <a:solidFill>
             <a:schemeClr val="tx1"/>
           </a:solidFill>
@@ -3274,8 +2921,8 @@
           <a:cs typeface="+mn-cs"/>
         </a:defRPr>
       </a:lvl6pPr>
-      <a:lvl7pPr marL="2743200" algn="l" defTabSz="914400" rtl="0" eaLnBrk="1" latinLnBrk="0" hangingPunct="1">
-        <a:defRPr sz="1800" kern="1200">
+      <a:lvl7pPr marL="1462949" algn="l" defTabSz="487650" rtl="0" eaLnBrk="1" latinLnBrk="0" hangingPunct="1">
+        <a:defRPr sz="960" kern="1200">
           <a:solidFill>
             <a:schemeClr val="tx1"/>
           </a:solidFill>
@@ -3284,8 +2931,8 @@
           <a:cs typeface="+mn-cs"/>
         </a:defRPr>
       </a:lvl7pPr>
-      <a:lvl8pPr marL="3200400" algn="l" defTabSz="914400" rtl="0" eaLnBrk="1" latinLnBrk="0" hangingPunct="1">
-        <a:defRPr sz="1800" kern="1200">
+      <a:lvl8pPr marL="1706773" algn="l" defTabSz="487650" rtl="0" eaLnBrk="1" latinLnBrk="0" hangingPunct="1">
+        <a:defRPr sz="960" kern="1200">
           <a:solidFill>
             <a:schemeClr val="tx1"/>
           </a:solidFill>
@@ -3294,8 +2941,8 @@
           <a:cs typeface="+mn-cs"/>
         </a:defRPr>
       </a:lvl8pPr>
-      <a:lvl9pPr marL="3657600" algn="l" defTabSz="914400" rtl="0" eaLnBrk="1" latinLnBrk="0" hangingPunct="1">
-        <a:defRPr sz="1800" kern="1200">
+      <a:lvl9pPr marL="1950598" algn="l" defTabSz="487650" rtl="0" eaLnBrk="1" latinLnBrk="0" hangingPunct="1">
+        <a:defRPr sz="960" kern="1200">
           <a:solidFill>
             <a:schemeClr val="tx1"/>
           </a:solidFill>
@@ -3326,102 +2973,12 @@
           <a:chExt cx="0" cy="0"/>
         </a:xfrm>
       </p:grpSpPr>
-      <p:sp>
-        <p:nvSpPr>
-          <p:cNvPr id="15" name="TextBox 14">
+      <p:grpSp>
+        <p:nvGrpSpPr>
+          <p:cNvPr id="3" name="Group 2">
             <a:extLst>
               <a:ext uri="{FF2B5EF4-FFF2-40B4-BE49-F238E27FC236}">
-                <a16:creationId xmlns:a16="http://schemas.microsoft.com/office/drawing/2014/main" id="{970E4FF7-00FA-0561-B227-CB8E47FA59A9}"/>
-              </a:ext>
-            </a:extLst>
-          </p:cNvPr>
-          <p:cNvSpPr txBox="1"/>
-          <p:nvPr/>
-        </p:nvSpPr>
-        <p:spPr>
-          <a:xfrm>
-            <a:off x="1467853" y="3737811"/>
-            <a:ext cx="6400800" cy="1200329"/>
-          </a:xfrm>
-          <a:prstGeom prst="rect">
-            <a:avLst/>
-          </a:prstGeom>
-          <a:noFill/>
-        </p:spPr>
-        <p:txBody>
-          <a:bodyPr wrap="square" rtlCol="0">
-            <a:spAutoFit/>
-          </a:bodyPr>
-          <a:lstStyle/>
-          <a:p>
-            <a:r>
-              <a:rPr lang="en-US" dirty="0"/>
-              <a:t>To get this in the form I needed for overleaf, I </a:t>
-            </a:r>
-          </a:p>
-          <a:p>
-            <a:pPr marL="285750" indent="-285750">
-              <a:buFont typeface="Arial" panose="020B0604020202020204" pitchFamily="34" charset="0"/>
-              <a:buChar char="•"/>
-            </a:pPr>
-            <a:r>
-              <a:rPr lang="en-US" dirty="0"/>
-              <a:t>Did a “save as” pdf</a:t>
-            </a:r>
-          </a:p>
-          <a:p>
-            <a:pPr marL="285750" indent="-285750">
-              <a:buFont typeface="Arial" panose="020B0604020202020204" pitchFamily="34" charset="0"/>
-              <a:buChar char="•"/>
-            </a:pPr>
-            <a:r>
-              <a:rPr lang="en-US" dirty="0"/>
-              <a:t>Opened in Preview, did a tools/rectangular selection/crop, then exported as </a:t>
-            </a:r>
-            <a:r>
-              <a:rPr lang="en-US" dirty="0" err="1"/>
-              <a:t>png</a:t>
-            </a:r>
-            <a:endParaRPr lang="en-US" dirty="0"/>
-          </a:p>
-        </p:txBody>
-      </p:sp>
-      <p:pic>
-        <p:nvPicPr>
-          <p:cNvPr id="2" name="Picture 1">
-            <a:extLst>
-              <a:ext uri="{FF2B5EF4-FFF2-40B4-BE49-F238E27FC236}">
-                <a16:creationId xmlns:a16="http://schemas.microsoft.com/office/drawing/2014/main" id="{62413C0C-3B0D-D90F-E2CD-6AAFDA0EFA6E}"/>
-              </a:ext>
-            </a:extLst>
-          </p:cNvPr>
-          <p:cNvPicPr>
-            <a:picLocks noChangeAspect="1"/>
-          </p:cNvPicPr>
-          <p:nvPr/>
-        </p:nvPicPr>
-        <p:blipFill>
-          <a:blip r:embed="rId2"/>
-          <a:stretch>
-            <a:fillRect/>
-          </a:stretch>
-        </p:blipFill>
-        <p:spPr>
-          <a:xfrm>
-            <a:off x="774301" y="768165"/>
-            <a:ext cx="3459480" cy="2594610"/>
-          </a:xfrm>
-          <a:prstGeom prst="rect">
-            <a:avLst/>
-          </a:prstGeom>
-        </p:spPr>
-      </p:pic>
-      <p:grpSp>
-        <p:nvGrpSpPr>
-          <p:cNvPr id="6" name="Group 5">
-            <a:extLst>
-              <a:ext uri="{FF2B5EF4-FFF2-40B4-BE49-F238E27FC236}">
-                <a16:creationId xmlns:a16="http://schemas.microsoft.com/office/drawing/2014/main" id="{97392A05-0BC0-136E-1EDE-59390CFDDBC5}"/>
+                <a16:creationId xmlns:a16="http://schemas.microsoft.com/office/drawing/2014/main" id="{649B4B7B-E359-D172-D526-0BF5351EC2D4}"/>
               </a:ext>
             </a:extLst>
           </p:cNvPr>
@@ -3430,12 +2987,42 @@
         </p:nvGrpSpPr>
         <p:grpSpPr>
           <a:xfrm>
-            <a:off x="2184225" y="398833"/>
-            <a:ext cx="7202125" cy="370600"/>
-            <a:chOff x="2184225" y="398833"/>
-            <a:chExt cx="7202125" cy="370600"/>
+            <a:off x="553321" y="498696"/>
+            <a:ext cx="10057964" cy="2733765"/>
+            <a:chOff x="774301" y="668341"/>
+            <a:chExt cx="10057964" cy="2733765"/>
           </a:xfrm>
         </p:grpSpPr>
+        <p:pic>
+          <p:nvPicPr>
+            <p:cNvPr id="2" name="Picture 1">
+              <a:extLst>
+                <a:ext uri="{FF2B5EF4-FFF2-40B4-BE49-F238E27FC236}">
+                  <a16:creationId xmlns:a16="http://schemas.microsoft.com/office/drawing/2014/main" id="{62413C0C-3B0D-D90F-E2CD-6AAFDA0EFA6E}"/>
+                </a:ext>
+              </a:extLst>
+            </p:cNvPr>
+            <p:cNvPicPr>
+              <a:picLocks noChangeAspect="1"/>
+            </p:cNvPicPr>
+            <p:nvPr/>
+          </p:nvPicPr>
+          <p:blipFill>
+            <a:blip r:embed="rId2"/>
+            <a:stretch>
+              <a:fillRect/>
+            </a:stretch>
+          </p:blipFill>
+          <p:spPr>
+            <a:xfrm>
+              <a:off x="774301" y="768165"/>
+              <a:ext cx="3459480" cy="2594610"/>
+            </a:xfrm>
+            <a:prstGeom prst="rect">
+              <a:avLst/>
+            </a:prstGeom>
+          </p:spPr>
+        </p:pic>
         <p:grpSp>
           <p:nvGrpSpPr>
             <p:cNvPr id="14" name="Group 13">
@@ -3450,10 +3037,10 @@
           </p:nvGrpSpPr>
           <p:grpSpPr>
             <a:xfrm>
-              <a:off x="2184225" y="398833"/>
-              <a:ext cx="3836352" cy="370600"/>
-              <a:chOff x="1871404" y="264968"/>
-              <a:chExt cx="3836352" cy="370600"/>
+              <a:off x="2184225" y="668341"/>
+              <a:ext cx="3785913" cy="305020"/>
+              <a:chOff x="1871404" y="534476"/>
+              <a:chExt cx="3785913" cy="305020"/>
             </a:xfrm>
           </p:grpSpPr>
           <p:sp>
@@ -3470,8 +3057,8 @@
             </p:nvSpPr>
             <p:spPr>
               <a:xfrm>
-                <a:off x="1871404" y="264968"/>
-                <a:ext cx="525517" cy="369332"/>
+                <a:off x="1871404" y="534476"/>
+                <a:ext cx="525517" cy="305020"/>
               </a:xfrm>
               <a:prstGeom prst="rect">
                 <a:avLst/>
@@ -3486,8 +3073,25 @@
               <a:p>
                 <a:pPr algn="ctr"/>
                 <a:r>
-                  <a:rPr lang="en-US" dirty="0"/>
-                  <a:t>(a)</a:t>
+                  <a:rPr lang="en-US" dirty="0">
+                    <a:latin typeface="Times New Roman" panose="02020603050405020304" pitchFamily="18" charset="0"/>
+                    <a:cs typeface="Times New Roman" panose="02020603050405020304" pitchFamily="18" charset="0"/>
+                  </a:rPr>
+                  <a:t>(</a:t>
+                </a:r>
+                <a:r>
+                  <a:rPr lang="en-US" i="1" dirty="0">
+                    <a:latin typeface="Times New Roman" panose="02020603050405020304" pitchFamily="18" charset="0"/>
+                    <a:cs typeface="Times New Roman" panose="02020603050405020304" pitchFamily="18" charset="0"/>
+                  </a:rPr>
+                  <a:t>a</a:t>
+                </a:r>
+                <a:r>
+                  <a:rPr lang="en-US" dirty="0">
+                    <a:latin typeface="Times New Roman" panose="02020603050405020304" pitchFamily="18" charset="0"/>
+                    <a:cs typeface="Times New Roman" panose="02020603050405020304" pitchFamily="18" charset="0"/>
+                  </a:rPr>
+                  <a:t>)</a:t>
                 </a:r>
               </a:p>
             </p:txBody>
@@ -3506,8 +3110,8 @@
             </p:nvSpPr>
             <p:spPr>
               <a:xfrm>
-                <a:off x="5182239" y="266236"/>
-                <a:ext cx="525517" cy="369332"/>
+                <a:off x="5131800" y="534476"/>
+                <a:ext cx="525517" cy="305020"/>
               </a:xfrm>
               <a:prstGeom prst="rect">
                 <a:avLst/>
@@ -3522,110 +3126,144 @@
               <a:p>
                 <a:pPr algn="ctr"/>
                 <a:r>
-                  <a:rPr lang="en-US" dirty="0"/>
-                  <a:t>(b)</a:t>
+                  <a:rPr lang="en-US" dirty="0">
+                    <a:latin typeface="Times New Roman" panose="02020603050405020304" pitchFamily="18" charset="0"/>
+                    <a:cs typeface="Times New Roman" panose="02020603050405020304" pitchFamily="18" charset="0"/>
+                  </a:rPr>
+                  <a:t>(</a:t>
+                </a:r>
+                <a:r>
+                  <a:rPr lang="en-US" i="1" dirty="0">
+                    <a:latin typeface="Times New Roman" panose="02020603050405020304" pitchFamily="18" charset="0"/>
+                    <a:cs typeface="Times New Roman" panose="02020603050405020304" pitchFamily="18" charset="0"/>
+                  </a:rPr>
+                  <a:t>b</a:t>
+                </a:r>
+                <a:r>
+                  <a:rPr lang="en-US" dirty="0">
+                    <a:latin typeface="Times New Roman" panose="02020603050405020304" pitchFamily="18" charset="0"/>
+                    <a:cs typeface="Times New Roman" panose="02020603050405020304" pitchFamily="18" charset="0"/>
+                  </a:rPr>
+                  <a:t>)</a:t>
                 </a:r>
               </a:p>
             </p:txBody>
           </p:sp>
         </p:grpSp>
-        <p:sp>
-          <p:nvSpPr>
-            <p:cNvPr id="4" name="TextBox 3">
+        <p:pic>
+          <p:nvPicPr>
+            <p:cNvPr id="5" name="Picture 4">
               <a:extLst>
                 <a:ext uri="{FF2B5EF4-FFF2-40B4-BE49-F238E27FC236}">
-                  <a16:creationId xmlns:a16="http://schemas.microsoft.com/office/drawing/2014/main" id="{1F8AF5FC-B229-4423-743C-31BC8155CC7A}"/>
+                  <a16:creationId xmlns:a16="http://schemas.microsoft.com/office/drawing/2014/main" id="{95898914-25AA-63D9-B52C-6746F1913C99}"/>
                 </a:ext>
               </a:extLst>
             </p:cNvPr>
-            <p:cNvSpPr txBox="1"/>
+            <p:cNvPicPr>
+              <a:picLocks noChangeAspect="1"/>
+            </p:cNvPicPr>
             <p:nvPr/>
-          </p:nvSpPr>
+          </p:nvPicPr>
+          <p:blipFill>
+            <a:blip r:embed="rId3"/>
+            <a:stretch>
+              <a:fillRect/>
+            </a:stretch>
+          </p:blipFill>
           <p:spPr>
             <a:xfrm>
-              <a:off x="8860833" y="398833"/>
-              <a:ext cx="525517" cy="369332"/>
+              <a:off x="4075380" y="1026345"/>
+              <a:ext cx="3192936" cy="2375761"/>
             </a:xfrm>
             <a:prstGeom prst="rect">
               <a:avLst/>
             </a:prstGeom>
-            <a:noFill/>
           </p:spPr>
-          <p:txBody>
-            <a:bodyPr wrap="square" rtlCol="0">
-              <a:spAutoFit/>
-            </a:bodyPr>
-            <a:lstStyle/>
-            <a:p>
-              <a:pPr algn="ctr"/>
-              <a:r>
-                <a:rPr lang="en-US" dirty="0"/>
-                <a:t>(c)</a:t>
-              </a:r>
-            </a:p>
-          </p:txBody>
-        </p:sp>
+        </p:pic>
+        <p:pic>
+          <p:nvPicPr>
+            <p:cNvPr id="9" name="Picture 8">
+              <a:extLst>
+                <a:ext uri="{FF2B5EF4-FFF2-40B4-BE49-F238E27FC236}">
+                  <a16:creationId xmlns:a16="http://schemas.microsoft.com/office/drawing/2014/main" id="{19318E97-B1D4-2D85-E27C-38ADEDFFDAE9}"/>
+                </a:ext>
+              </a:extLst>
+            </p:cNvPr>
+            <p:cNvPicPr>
+              <a:picLocks noChangeAspect="1"/>
+            </p:cNvPicPr>
+            <p:nvPr/>
+          </p:nvPicPr>
+          <p:blipFill>
+            <a:blip r:embed="rId4"/>
+            <a:stretch>
+              <a:fillRect/>
+            </a:stretch>
+          </p:blipFill>
+          <p:spPr>
+            <a:xfrm>
+              <a:off x="7354212" y="768165"/>
+              <a:ext cx="3478053" cy="2608540"/>
+            </a:xfrm>
+            <a:prstGeom prst="rect">
+              <a:avLst/>
+            </a:prstGeom>
+          </p:spPr>
+        </p:pic>
       </p:grpSp>
-      <p:pic>
-        <p:nvPicPr>
-          <p:cNvPr id="5" name="Picture 4">
+      <p:sp>
+        <p:nvSpPr>
+          <p:cNvPr id="7" name="TextBox 6">
             <a:extLst>
               <a:ext uri="{FF2B5EF4-FFF2-40B4-BE49-F238E27FC236}">
-                <a16:creationId xmlns:a16="http://schemas.microsoft.com/office/drawing/2014/main" id="{95898914-25AA-63D9-B52C-6746F1913C99}"/>
+                <a16:creationId xmlns:a16="http://schemas.microsoft.com/office/drawing/2014/main" id="{46F74D0E-7567-E3FF-6196-79ED407A4CC9}"/>
               </a:ext>
             </a:extLst>
           </p:cNvPr>
-          <p:cNvPicPr>
-            <a:picLocks noChangeAspect="1"/>
-          </p:cNvPicPr>
+          <p:cNvSpPr txBox="1"/>
           <p:nvPr/>
-        </p:nvPicPr>
-        <p:blipFill>
-          <a:blip r:embed="rId3"/>
-          <a:stretch>
-            <a:fillRect/>
-          </a:stretch>
-        </p:blipFill>
+        </p:nvSpPr>
         <p:spPr>
           <a:xfrm>
-            <a:off x="4075380" y="1026345"/>
-            <a:ext cx="3192936" cy="2375761"/>
+            <a:off x="8606830" y="496849"/>
+            <a:ext cx="525517" cy="305020"/>
           </a:xfrm>
           <a:prstGeom prst="rect">
             <a:avLst/>
           </a:prstGeom>
+          <a:noFill/>
         </p:spPr>
-      </p:pic>
-      <p:pic>
-        <p:nvPicPr>
-          <p:cNvPr id="9" name="Picture 8">
-            <a:extLst>
-              <a:ext uri="{FF2B5EF4-FFF2-40B4-BE49-F238E27FC236}">
-                <a16:creationId xmlns:a16="http://schemas.microsoft.com/office/drawing/2014/main" id="{19318E97-B1D4-2D85-E27C-38ADEDFFDAE9}"/>
-              </a:ext>
-            </a:extLst>
-          </p:cNvPr>
-          <p:cNvPicPr>
-            <a:picLocks noChangeAspect="1"/>
-          </p:cNvPicPr>
-          <p:nvPr/>
-        </p:nvPicPr>
-        <p:blipFill>
-          <a:blip r:embed="rId4"/>
-          <a:stretch>
-            <a:fillRect/>
-          </a:stretch>
-        </p:blipFill>
-        <p:spPr>
-          <a:xfrm>
-            <a:off x="7354212" y="768165"/>
-            <a:ext cx="3478053" cy="2608540"/>
-          </a:xfrm>
-          <a:prstGeom prst="rect">
-            <a:avLst/>
-          </a:prstGeom>
-        </p:spPr>
-      </p:pic>
+        <p:txBody>
+          <a:bodyPr wrap="square" rtlCol="0">
+            <a:spAutoFit/>
+          </a:bodyPr>
+          <a:lstStyle/>
+          <a:p>
+            <a:pPr algn="ctr"/>
+            <a:r>
+              <a:rPr lang="en-US" dirty="0">
+                <a:latin typeface="Times New Roman" panose="02020603050405020304" pitchFamily="18" charset="0"/>
+                <a:cs typeface="Times New Roman" panose="02020603050405020304" pitchFamily="18" charset="0"/>
+              </a:rPr>
+              <a:t>(</a:t>
+            </a:r>
+            <a:r>
+              <a:rPr lang="en-US" i="1" dirty="0">
+                <a:latin typeface="Times New Roman" panose="02020603050405020304" pitchFamily="18" charset="0"/>
+                <a:cs typeface="Times New Roman" panose="02020603050405020304" pitchFamily="18" charset="0"/>
+              </a:rPr>
+              <a:t>c</a:t>
+            </a:r>
+            <a:r>
+              <a:rPr lang="en-US" dirty="0">
+                <a:latin typeface="Times New Roman" panose="02020603050405020304" pitchFamily="18" charset="0"/>
+                <a:cs typeface="Times New Roman" panose="02020603050405020304" pitchFamily="18" charset="0"/>
+              </a:rPr>
+              <a:t>)</a:t>
+            </a:r>
+          </a:p>
+        </p:txBody>
+      </p:sp>
     </p:spTree>
     <p:extLst>
       <p:ext uri="{BB962C8B-B14F-4D97-AF65-F5344CB8AC3E}">
@@ -3642,7 +3280,7 @@
 <file path=ppt/theme/theme1.xml><?xml version="1.0" encoding="utf-8"?>
 <a:theme xmlns:a="http://schemas.openxmlformats.org/drawingml/2006/main" name="Office Theme">
   <a:themeElements>
-    <a:clrScheme name="Office">
+    <a:clrScheme name="Office Theme">
       <a:dk1>
         <a:sysClr val="windowText" lastClr="000000"/>
       </a:dk1>
@@ -3680,7 +3318,7 @@
         <a:srgbClr val="954F72"/>
       </a:folHlink>
     </a:clrScheme>
-    <a:fontScheme name="Office">
+    <a:fontScheme name="Office Theme">
       <a:majorFont>
         <a:latin typeface="Calibri Light" panose="020F0302020204030204"/>
         <a:ea typeface=""/>
@@ -3715,23 +3353,6 @@
         <a:font script="Viet" typeface="Times New Roman"/>
         <a:font script="Uigh" typeface="Microsoft Uighur"/>
         <a:font script="Geor" typeface="Sylfaen"/>
-        <a:font script="Armn" typeface="Arial"/>
-        <a:font script="Bugi" typeface="Leelawadee UI"/>
-        <a:font script="Bopo" typeface="Microsoft JhengHei"/>
-        <a:font script="Java" typeface="Javanese Text"/>
-        <a:font script="Lisu" typeface="Segoe UI"/>
-        <a:font script="Mymr" typeface="Myanmar Text"/>
-        <a:font script="Nkoo" typeface="Ebrima"/>
-        <a:font script="Olck" typeface="Nirmala UI"/>
-        <a:font script="Osma" typeface="Ebrima"/>
-        <a:font script="Phag" typeface="Phagspa"/>
-        <a:font script="Syrn" typeface="Estrangelo Edessa"/>
-        <a:font script="Syrj" typeface="Estrangelo Edessa"/>
-        <a:font script="Syre" typeface="Estrangelo Edessa"/>
-        <a:font script="Sora" typeface="Nirmala UI"/>
-        <a:font script="Tale" typeface="Microsoft Tai Le"/>
-        <a:font script="Talu" typeface="Microsoft New Tai Lue"/>
-        <a:font script="Tfng" typeface="Ebrima"/>
       </a:majorFont>
       <a:minorFont>
         <a:latin typeface="Calibri" panose="020F0502020204030204"/>
@@ -3767,26 +3388,9 @@
         <a:font script="Viet" typeface="Arial"/>
         <a:font script="Uigh" typeface="Microsoft Uighur"/>
         <a:font script="Geor" typeface="Sylfaen"/>
-        <a:font script="Armn" typeface="Arial"/>
-        <a:font script="Bugi" typeface="Leelawadee UI"/>
-        <a:font script="Bopo" typeface="Microsoft JhengHei"/>
-        <a:font script="Java" typeface="Javanese Text"/>
-        <a:font script="Lisu" typeface="Segoe UI"/>
-        <a:font script="Mymr" typeface="Myanmar Text"/>
-        <a:font script="Nkoo" typeface="Ebrima"/>
-        <a:font script="Olck" typeface="Nirmala UI"/>
-        <a:font script="Osma" typeface="Ebrima"/>
-        <a:font script="Phag" typeface="Phagspa"/>
-        <a:font script="Syrn" typeface="Estrangelo Edessa"/>
-        <a:font script="Syrj" typeface="Estrangelo Edessa"/>
-        <a:font script="Syre" typeface="Estrangelo Edessa"/>
-        <a:font script="Sora" typeface="Nirmala UI"/>
-        <a:font script="Tale" typeface="Microsoft Tai Le"/>
-        <a:font script="Talu" typeface="Microsoft New Tai Lue"/>
-        <a:font script="Tfng" typeface="Ebrima"/>
       </a:minorFont>
     </a:fontScheme>
-    <a:fmtScheme name="Office">
+    <a:fmtScheme name="Office Theme">
       <a:fillStyleLst>
         <a:solidFill>
           <a:schemeClr val="phClr"/>
@@ -3928,7 +3532,7 @@
   <a:extraClrSchemeLst/>
   <a:extLst>
     <a:ext uri="{05A4C25C-085E-4340-85A3-A5531E510DB2}">
-      <thm15:themeFamily xmlns:thm15="http://schemas.microsoft.com/office/thememl/2012/main" name="Office Theme" id="{62F939B6-93AF-4DB8-9C6B-D6C7DFDC589F}" vid="{4A3C46E8-61CC-4603-A589-7422A47A8E4A}"/>
+      <thm15:themeFamily xmlns:thm15="http://schemas.microsoft.com/office/thememl/2012/main" name="Office 2013 - 2022 Theme" id="{62F939B6-93AF-4DB8-9C6B-D6C7DFDC589F}" vid="{4A3C46E8-61CC-4603-A589-7422A47A8E4A}"/>
     </a:ext>
   </a:extLst>
 </a:theme>
